--- a/slides/02_map_diagnostics.pptx
+++ b/slides/02_map_diagnostics.pptx
@@ -6,23 +6,22 @@
   </p:sldMasterIdLst>
   <p:sldIdLst>
     <p:sldId id="257" r:id="rId2"/>
-    <p:sldId id="1473" r:id="rId3"/>
-    <p:sldId id="1474" r:id="rId4"/>
-    <p:sldId id="1475" r:id="rId5"/>
-    <p:sldId id="1476" r:id="rId6"/>
-    <p:sldId id="1477" r:id="rId7"/>
-    <p:sldId id="1478" r:id="rId8"/>
-    <p:sldId id="1479" r:id="rId9"/>
-    <p:sldId id="1480" r:id="rId10"/>
-    <p:sldId id="1482" r:id="rId11"/>
-    <p:sldId id="1484" r:id="rId12"/>
-    <p:sldId id="1483" r:id="rId13"/>
-    <p:sldId id="1485" r:id="rId14"/>
-    <p:sldId id="1486" r:id="rId15"/>
-    <p:sldId id="1487" r:id="rId16"/>
-    <p:sldId id="1488" r:id="rId17"/>
-    <p:sldId id="1489" r:id="rId18"/>
-    <p:sldId id="1490" r:id="rId19"/>
+    <p:sldId id="1474" r:id="rId3"/>
+    <p:sldId id="1475" r:id="rId4"/>
+    <p:sldId id="1476" r:id="rId5"/>
+    <p:sldId id="1477" r:id="rId6"/>
+    <p:sldId id="1478" r:id="rId7"/>
+    <p:sldId id="1479" r:id="rId8"/>
+    <p:sldId id="1480" r:id="rId9"/>
+    <p:sldId id="1482" r:id="rId10"/>
+    <p:sldId id="1484" r:id="rId11"/>
+    <p:sldId id="1483" r:id="rId12"/>
+    <p:sldId id="1485" r:id="rId13"/>
+    <p:sldId id="1486" r:id="rId14"/>
+    <p:sldId id="1487" r:id="rId15"/>
+    <p:sldId id="1488" r:id="rId16"/>
+    <p:sldId id="1489" r:id="rId17"/>
+    <p:sldId id="1490" r:id="rId18"/>
   </p:sldIdLst>
   <p:sldSz cx="12192000" cy="6858000"/>
   <p:notesSz cx="6858000" cy="9144000"/>
@@ -121,6 +120,11 @@
       </a:defRPr>
     </a:lvl9pPr>
   </p:defaultTextStyle>
+  <p:extLst>
+    <p:ext uri="{EFAFB233-063F-42B5-8137-9DF3F51BA10A}">
+      <p15:sldGuideLst xmlns:p15="http://schemas.microsoft.com/office/powerpoint/2012/main"/>
+    </p:ext>
+  </p:extLst>
 </p:presentation>
 </file>
 
@@ -273,7 +277,7 @@
           <a:p>
             <a:fld id="{9DFFAEB2-98C5-5947-A6D3-E7D6DCE397AA}" type="datetimeFigureOut">
               <a:rPr lang="en-US" smtClean="0"/>
-              <a:t>7/7/25</a:t>
+              <a:t>7/8/25</a:t>
             </a:fld>
             <a:endParaRPr lang="en-US"/>
           </a:p>
@@ -473,7 +477,7 @@
           <a:p>
             <a:fld id="{9DFFAEB2-98C5-5947-A6D3-E7D6DCE397AA}" type="datetimeFigureOut">
               <a:rPr lang="en-US" smtClean="0"/>
-              <a:t>7/7/25</a:t>
+              <a:t>7/8/25</a:t>
             </a:fld>
             <a:endParaRPr lang="en-US"/>
           </a:p>
@@ -683,7 +687,7 @@
           <a:p>
             <a:fld id="{9DFFAEB2-98C5-5947-A6D3-E7D6DCE397AA}" type="datetimeFigureOut">
               <a:rPr lang="en-US" smtClean="0"/>
-              <a:t>7/7/25</a:t>
+              <a:t>7/8/25</a:t>
             </a:fld>
             <a:endParaRPr lang="en-US"/>
           </a:p>
@@ -883,7 +887,7 @@
           <a:p>
             <a:fld id="{9DFFAEB2-98C5-5947-A6D3-E7D6DCE397AA}" type="datetimeFigureOut">
               <a:rPr lang="en-US" smtClean="0"/>
-              <a:t>7/7/25</a:t>
+              <a:t>7/8/25</a:t>
             </a:fld>
             <a:endParaRPr lang="en-US"/>
           </a:p>
@@ -1159,7 +1163,7 @@
           <a:p>
             <a:fld id="{9DFFAEB2-98C5-5947-A6D3-E7D6DCE397AA}" type="datetimeFigureOut">
               <a:rPr lang="en-US" smtClean="0"/>
-              <a:t>7/7/25</a:t>
+              <a:t>7/8/25</a:t>
             </a:fld>
             <a:endParaRPr lang="en-US"/>
           </a:p>
@@ -1427,7 +1431,7 @@
           <a:p>
             <a:fld id="{9DFFAEB2-98C5-5947-A6D3-E7D6DCE397AA}" type="datetimeFigureOut">
               <a:rPr lang="en-US" smtClean="0"/>
-              <a:t>7/7/25</a:t>
+              <a:t>7/8/25</a:t>
             </a:fld>
             <a:endParaRPr lang="en-US"/>
           </a:p>
@@ -1842,7 +1846,7 @@
           <a:p>
             <a:fld id="{9DFFAEB2-98C5-5947-A6D3-E7D6DCE397AA}" type="datetimeFigureOut">
               <a:rPr lang="en-US" smtClean="0"/>
-              <a:t>7/7/25</a:t>
+              <a:t>7/8/25</a:t>
             </a:fld>
             <a:endParaRPr lang="en-US"/>
           </a:p>
@@ -1984,7 +1988,7 @@
           <a:p>
             <a:fld id="{9DFFAEB2-98C5-5947-A6D3-E7D6DCE397AA}" type="datetimeFigureOut">
               <a:rPr lang="en-US" smtClean="0"/>
-              <a:t>7/7/25</a:t>
+              <a:t>7/8/25</a:t>
             </a:fld>
             <a:endParaRPr lang="en-US"/>
           </a:p>
@@ -2097,7 +2101,7 @@
           <a:p>
             <a:fld id="{9DFFAEB2-98C5-5947-A6D3-E7D6DCE397AA}" type="datetimeFigureOut">
               <a:rPr lang="en-US" smtClean="0"/>
-              <a:t>7/7/25</a:t>
+              <a:t>7/8/25</a:t>
             </a:fld>
             <a:endParaRPr lang="en-US"/>
           </a:p>
@@ -2410,7 +2414,7 @@
           <a:p>
             <a:fld id="{9DFFAEB2-98C5-5947-A6D3-E7D6DCE397AA}" type="datetimeFigureOut">
               <a:rPr lang="en-US" smtClean="0"/>
-              <a:t>7/7/25</a:t>
+              <a:t>7/8/25</a:t>
             </a:fld>
             <a:endParaRPr lang="en-US"/>
           </a:p>
@@ -2699,7 +2703,7 @@
           <a:p>
             <a:fld id="{9DFFAEB2-98C5-5947-A6D3-E7D6DCE397AA}" type="datetimeFigureOut">
               <a:rPr lang="en-US" smtClean="0"/>
-              <a:t>7/7/25</a:t>
+              <a:t>7/8/25</a:t>
             </a:fld>
             <a:endParaRPr lang="en-US"/>
           </a:p>
@@ -2942,7 +2946,7 @@
           <a:p>
             <a:fld id="{9DFFAEB2-98C5-5947-A6D3-E7D6DCE397AA}" type="datetimeFigureOut">
               <a:rPr lang="en-US" smtClean="0"/>
-              <a:t>7/7/25</a:t>
+              <a:t>7/8/25</a:t>
             </a:fld>
             <a:endParaRPr lang="en-US"/>
           </a:p>
@@ -5295,1969 +5299,6 @@
       </p:sp>
       <p:sp>
         <p:nvSpPr>
-          <p:cNvPr id="9" name="TextBox 8">
-            <a:extLst>
-              <a:ext uri="{FF2B5EF4-FFF2-40B4-BE49-F238E27FC236}">
-                <a16:creationId xmlns:a16="http://schemas.microsoft.com/office/drawing/2014/main" id="{8FD9CFB1-371F-BEE0-F6BC-0E52A34D55D6}"/>
-              </a:ext>
-            </a:extLst>
-          </p:cNvPr>
-          <p:cNvSpPr txBox="1"/>
-          <p:nvPr/>
-        </p:nvSpPr>
-        <p:spPr>
-          <a:xfrm>
-            <a:off x="535608" y="6162482"/>
-            <a:ext cx="4096378" cy="369332"/>
-          </a:xfrm>
-          <a:prstGeom prst="rect">
-            <a:avLst/>
-          </a:prstGeom>
-          <a:noFill/>
-        </p:spPr>
-        <p:txBody>
-          <a:bodyPr wrap="none" rtlCol="0">
-            <a:spAutoFit/>
-          </a:bodyPr>
-          <a:lstStyle/>
-          <a:p>
-            <a:r>
-              <a:rPr lang="en-US" dirty="0"/>
-              <a:t>We know </a:t>
-            </a:r>
-            <a:r>
-              <a:rPr lang="en-US" dirty="0">
-                <a:solidFill>
-                  <a:srgbClr val="FF0000"/>
-                </a:solidFill>
-              </a:rPr>
-              <a:t>X = 80</a:t>
-            </a:r>
-            <a:r>
-              <a:rPr lang="en-US" dirty="0"/>
-              <a:t>, so CV error is 80-72 = </a:t>
-            </a:r>
-            <a:r>
-              <a:rPr lang="en-US" dirty="0">
-                <a:solidFill>
-                  <a:srgbClr val="FF0000"/>
-                </a:solidFill>
-              </a:rPr>
-              <a:t>8</a:t>
-            </a:r>
-          </a:p>
-        </p:txBody>
-      </p:sp>
-      <p:sp>
-        <p:nvSpPr>
-          <p:cNvPr id="11" name="TextBox 10">
-            <a:extLst>
-              <a:ext uri="{FF2B5EF4-FFF2-40B4-BE49-F238E27FC236}">
-                <a16:creationId xmlns:a16="http://schemas.microsoft.com/office/drawing/2014/main" id="{47D0F2FE-3EEB-6B46-BC15-ED7C4C99BD85}"/>
-              </a:ext>
-            </a:extLst>
-          </p:cNvPr>
-          <p:cNvSpPr txBox="1"/>
-          <p:nvPr/>
-        </p:nvSpPr>
-        <p:spPr>
-          <a:xfrm>
-            <a:off x="527436" y="6467925"/>
-            <a:ext cx="3694044" cy="276999"/>
-          </a:xfrm>
-          <a:prstGeom prst="rect">
-            <a:avLst/>
-          </a:prstGeom>
-          <a:noFill/>
-        </p:spPr>
-        <p:txBody>
-          <a:bodyPr wrap="square">
-            <a:spAutoFit/>
-          </a:bodyPr>
-          <a:lstStyle/>
-          <a:p>
-            <a:r>
-              <a:rPr lang="en-GB" sz="1200" dirty="0">
-                <a:solidFill>
-                  <a:schemeClr val="bg2">
-                    <a:lumMod val="50000"/>
-                  </a:schemeClr>
-                </a:solidFill>
-              </a:rPr>
-              <a:t>(but really we work in log space, so CV error is 0.15)</a:t>
-            </a:r>
-            <a:endParaRPr lang="en-US" sz="1200" dirty="0">
-              <a:solidFill>
-                <a:schemeClr val="bg2">
-                  <a:lumMod val="50000"/>
-                </a:schemeClr>
-              </a:solidFill>
-            </a:endParaRPr>
-          </a:p>
-        </p:txBody>
-      </p:sp>
-    </p:spTree>
-    <p:extLst>
-      <p:ext uri="{BB962C8B-B14F-4D97-AF65-F5344CB8AC3E}">
-        <p14:creationId xmlns:p14="http://schemas.microsoft.com/office/powerpoint/2010/main" val="1159949362"/>
-      </p:ext>
-    </p:extLst>
-  </p:cSld>
-  <p:clrMapOvr>
-    <a:masterClrMapping/>
-  </p:clrMapOvr>
-</p:sld>
-</file>
-
-<file path=ppt/slides/slide11.xml><?xml version="1.0" encoding="utf-8"?>
-<p:sld xmlns:a="http://schemas.openxmlformats.org/drawingml/2006/main" xmlns:r="http://schemas.openxmlformats.org/officeDocument/2006/relationships" xmlns:p="http://schemas.openxmlformats.org/presentationml/2006/main">
-  <p:cSld>
-    <p:spTree>
-      <p:nvGrpSpPr>
-        <p:cNvPr id="1" name=""/>
-        <p:cNvGrpSpPr/>
-        <p:nvPr/>
-      </p:nvGrpSpPr>
-      <p:grpSpPr>
-        <a:xfrm>
-          <a:off x="0" y="0"/>
-          <a:ext cx="0" cy="0"/>
-          <a:chOff x="0" y="0"/>
-          <a:chExt cx="0" cy="0"/>
-        </a:xfrm>
-      </p:grpSpPr>
-      <p:sp>
-        <p:nvSpPr>
-          <p:cNvPr id="2" name="Title 1">
-            <a:extLst>
-              <a:ext uri="{FF2B5EF4-FFF2-40B4-BE49-F238E27FC236}">
-                <a16:creationId xmlns:a16="http://schemas.microsoft.com/office/drawing/2014/main" id="{2AAE06CD-340E-A294-A6C1-F5142DA0FE44}"/>
-              </a:ext>
-            </a:extLst>
-          </p:cNvPr>
-          <p:cNvSpPr>
-            <a:spLocks noGrp="1"/>
-          </p:cNvSpPr>
-          <p:nvPr>
-            <p:ph type="title"/>
-          </p:nvPr>
-        </p:nvSpPr>
-        <p:spPr>
-          <a:xfrm>
-            <a:off x="137160" y="161925"/>
-            <a:ext cx="11892280" cy="671195"/>
-          </a:xfrm>
-        </p:spPr>
-        <p:txBody>
-          <a:bodyPr>
-            <a:normAutofit/>
-          </a:bodyPr>
-          <a:lstStyle/>
-          <a:p>
-            <a:r>
-              <a:rPr lang="en-US" sz="3600"/>
-              <a:t>Cross validation error</a:t>
-            </a:r>
-            <a:endParaRPr lang="en-US" sz="3600" i="1" dirty="0"/>
-          </a:p>
-        </p:txBody>
-      </p:sp>
-      <p:graphicFrame>
-        <p:nvGraphicFramePr>
-          <p:cNvPr id="4" name="Table 4">
-            <a:extLst>
-              <a:ext uri="{FF2B5EF4-FFF2-40B4-BE49-F238E27FC236}">
-                <a16:creationId xmlns:a16="http://schemas.microsoft.com/office/drawing/2014/main" id="{D1EEA2CF-55AF-C5FD-AF4A-D403AD31F49A}"/>
-              </a:ext>
-            </a:extLst>
-          </p:cNvPr>
-          <p:cNvGraphicFramePr>
-            <a:graphicFrameLocks noGrp="1"/>
-          </p:cNvGraphicFramePr>
-          <p:nvPr/>
-        </p:nvGraphicFramePr>
-        <p:xfrm>
-          <a:off x="484828" y="1113786"/>
-          <a:ext cx="5468932" cy="1854200"/>
-        </p:xfrm>
-        <a:graphic>
-          <a:graphicData uri="http://schemas.openxmlformats.org/drawingml/2006/table">
-            <a:tbl>
-              <a:tblPr firstRow="1" bandRow="1">
-                <a:tableStyleId>{9D7B26C5-4107-4FEC-AEDC-1716B250A1EF}</a:tableStyleId>
-              </a:tblPr>
-              <a:tblGrid>
-                <a:gridCol w="1800439">
-                  <a:extLst>
-                    <a:ext uri="{9D8B030D-6E8A-4147-A177-3AD203B41FA5}">
-                      <a16:colId xmlns:a16="http://schemas.microsoft.com/office/drawing/2014/main" val="2351268341"/>
-                    </a:ext>
-                  </a:extLst>
-                </a:gridCol>
-                <a:gridCol w="1073349">
-                  <a:extLst>
-                    <a:ext uri="{9D8B030D-6E8A-4147-A177-3AD203B41FA5}">
-                      <a16:colId xmlns:a16="http://schemas.microsoft.com/office/drawing/2014/main" val="3051075737"/>
-                    </a:ext>
-                  </a:extLst>
-                </a:gridCol>
-                <a:gridCol w="1297572">
-                  <a:extLst>
-                    <a:ext uri="{9D8B030D-6E8A-4147-A177-3AD203B41FA5}">
-                      <a16:colId xmlns:a16="http://schemas.microsoft.com/office/drawing/2014/main" val="2719525100"/>
-                    </a:ext>
-                  </a:extLst>
-                </a:gridCol>
-                <a:gridCol w="1297572">
-                  <a:extLst>
-                    <a:ext uri="{9D8B030D-6E8A-4147-A177-3AD203B41FA5}">
-                      <a16:colId xmlns:a16="http://schemas.microsoft.com/office/drawing/2014/main" val="1312788050"/>
-                    </a:ext>
-                  </a:extLst>
-                </a:gridCol>
-              </a:tblGrid>
-              <a:tr h="370840">
-                <a:tc>
-                  <a:txBody>
-                    <a:bodyPr/>
-                    <a:lstStyle/>
-                    <a:p>
-                      <a:endParaRPr lang="en-DE"/>
-                    </a:p>
-                  </a:txBody>
-                  <a:tcPr/>
-                </a:tc>
-                <a:tc>
-                  <a:txBody>
-                    <a:bodyPr/>
-                    <a:lstStyle/>
-                    <a:p>
-                      <a:pPr marL="0" marR="0" lvl="0" indent="0" algn="l" defTabSz="914400" rtl="0" eaLnBrk="1" fontAlgn="auto" latinLnBrk="0" hangingPunct="1">
-                        <a:lnSpc>
-                          <a:spcPct val="100000"/>
-                        </a:lnSpc>
-                        <a:spcBef>
-                          <a:spcPts val="0"/>
-                        </a:spcBef>
-                        <a:spcAft>
-                          <a:spcPts val="0"/>
-                        </a:spcAft>
-                        <a:buClrTx/>
-                        <a:buSzTx/>
-                        <a:buFontTx/>
-                        <a:buNone/>
-                        <a:tabLst/>
-                        <a:defRPr/>
-                      </a:pPr>
-                      <a:r>
-                        <a:rPr lang="en-GB" b="0" dirty="0">
-                          <a:solidFill>
-                            <a:sysClr val="windowText" lastClr="000000"/>
-                          </a:solidFill>
-                        </a:rPr>
-                        <a:t>SR: Wu1</a:t>
-                      </a:r>
-                      <a:endParaRPr lang="en-DE" b="0" dirty="0">
-                        <a:solidFill>
-                          <a:sysClr val="windowText" lastClr="000000"/>
-                        </a:solidFill>
-                      </a:endParaRPr>
-                    </a:p>
-                  </a:txBody>
-                  <a:tcPr/>
-                </a:tc>
-                <a:tc>
-                  <a:txBody>
-                    <a:bodyPr/>
-                    <a:lstStyle/>
-                    <a:p>
-                      <a:pPr marL="0" marR="0" lvl="0" indent="0" algn="l" defTabSz="914400" rtl="0" eaLnBrk="1" fontAlgn="auto" latinLnBrk="0" hangingPunct="1">
-                        <a:lnSpc>
-                          <a:spcPct val="100000"/>
-                        </a:lnSpc>
-                        <a:spcBef>
-                          <a:spcPts val="0"/>
-                        </a:spcBef>
-                        <a:spcAft>
-                          <a:spcPts val="0"/>
-                        </a:spcAft>
-                        <a:buClrTx/>
-                        <a:buSzTx/>
-                        <a:buFontTx/>
-                        <a:buNone/>
-                        <a:tabLst/>
-                        <a:defRPr/>
-                      </a:pPr>
-                      <a:r>
-                        <a:rPr lang="en-GB" b="0" dirty="0">
-                          <a:solidFill>
-                            <a:sysClr val="windowText" lastClr="000000"/>
-                          </a:solidFill>
-                        </a:rPr>
-                        <a:t>SR: BA.1</a:t>
-                      </a:r>
-                      <a:endParaRPr lang="en-DE" b="0">
-                        <a:solidFill>
-                          <a:sysClr val="windowText" lastClr="000000"/>
-                        </a:solidFill>
-                      </a:endParaRPr>
-                    </a:p>
-                  </a:txBody>
-                  <a:tcPr/>
-                </a:tc>
-                <a:tc>
-                  <a:txBody>
-                    <a:bodyPr/>
-                    <a:lstStyle/>
-                    <a:p>
-                      <a:pPr marL="0" marR="0" lvl="0" indent="0" algn="l" defTabSz="914400" rtl="0" eaLnBrk="1" fontAlgn="auto" latinLnBrk="0" hangingPunct="1">
-                        <a:lnSpc>
-                          <a:spcPct val="100000"/>
-                        </a:lnSpc>
-                        <a:spcBef>
-                          <a:spcPts val="0"/>
-                        </a:spcBef>
-                        <a:spcAft>
-                          <a:spcPts val="0"/>
-                        </a:spcAft>
-                        <a:buClrTx/>
-                        <a:buSzTx/>
-                        <a:buFontTx/>
-                        <a:buNone/>
-                        <a:tabLst/>
-                        <a:defRPr/>
-                      </a:pPr>
-                      <a:r>
-                        <a:rPr lang="en-GB" b="0" dirty="0">
-                          <a:solidFill>
-                            <a:sysClr val="windowText" lastClr="000000"/>
-                          </a:solidFill>
-                        </a:rPr>
-                        <a:t>…</a:t>
-                      </a:r>
-                      <a:endParaRPr lang="en-DE" b="0">
-                        <a:solidFill>
-                          <a:sysClr val="windowText" lastClr="000000"/>
-                        </a:solidFill>
-                      </a:endParaRPr>
-                    </a:p>
-                  </a:txBody>
-                  <a:tcPr/>
-                </a:tc>
-                <a:extLst>
-                  <a:ext uri="{0D108BD9-81ED-4DB2-BD59-A6C34878D82A}">
-                    <a16:rowId xmlns:a16="http://schemas.microsoft.com/office/drawing/2014/main" val="3871534099"/>
-                  </a:ext>
-                </a:extLst>
-              </a:tr>
-              <a:tr h="370840">
-                <a:tc>
-                  <a:txBody>
-                    <a:bodyPr/>
-                    <a:lstStyle/>
-                    <a:p>
-                      <a:pPr marL="0" marR="0" lvl="0" indent="0" algn="l" defTabSz="914400" rtl="0" eaLnBrk="1" fontAlgn="auto" latinLnBrk="0" hangingPunct="1">
-                        <a:lnSpc>
-                          <a:spcPct val="100000"/>
-                        </a:lnSpc>
-                        <a:spcBef>
-                          <a:spcPts val="0"/>
-                        </a:spcBef>
-                        <a:spcAft>
-                          <a:spcPts val="0"/>
-                        </a:spcAft>
-                        <a:buClrTx/>
-                        <a:buSzTx/>
-                        <a:buFontTx/>
-                        <a:buNone/>
-                        <a:tabLst/>
-                        <a:defRPr/>
-                      </a:pPr>
-                      <a:r>
-                        <a:rPr lang="en-GB" dirty="0">
-                          <a:solidFill>
-                            <a:schemeClr val="tx2">
-                              <a:lumMod val="75000"/>
-                              <a:lumOff val="25000"/>
-                            </a:schemeClr>
-                          </a:solidFill>
-                        </a:rPr>
-                        <a:t>Wu1</a:t>
-                      </a:r>
-                      <a:endParaRPr lang="en-DE" dirty="0">
-                        <a:solidFill>
-                          <a:schemeClr val="tx2">
-                            <a:lumMod val="75000"/>
-                            <a:lumOff val="25000"/>
-                          </a:schemeClr>
-                        </a:solidFill>
-                      </a:endParaRPr>
-                    </a:p>
-                  </a:txBody>
-                  <a:tcPr>
-                    <a:solidFill>
-                      <a:schemeClr val="bg1">
-                        <a:lumMod val="75000"/>
-                        <a:alpha val="20000"/>
-                      </a:schemeClr>
-                    </a:solidFill>
-                  </a:tcPr>
-                </a:tc>
-                <a:tc>
-                  <a:txBody>
-                    <a:bodyPr/>
-                    <a:lstStyle/>
-                    <a:p>
-                      <a:r>
-                        <a:rPr lang="en-DE" dirty="0"/>
-                        <a:t>160</a:t>
-                      </a:r>
-                    </a:p>
-                  </a:txBody>
-                  <a:tcPr>
-                    <a:solidFill>
-                      <a:schemeClr val="bg1">
-                        <a:lumMod val="75000"/>
-                        <a:alpha val="20000"/>
-                      </a:schemeClr>
-                    </a:solidFill>
-                  </a:tcPr>
-                </a:tc>
-                <a:tc>
-                  <a:txBody>
-                    <a:bodyPr/>
-                    <a:lstStyle/>
-                    <a:p>
-                      <a:pPr marL="0" marR="0" lvl="0" indent="0" algn="l" defTabSz="914400" rtl="0" eaLnBrk="1" fontAlgn="auto" latinLnBrk="0" hangingPunct="1">
-                        <a:lnSpc>
-                          <a:spcPct val="100000"/>
-                        </a:lnSpc>
-                        <a:spcBef>
-                          <a:spcPts val="0"/>
-                        </a:spcBef>
-                        <a:spcAft>
-                          <a:spcPts val="0"/>
-                        </a:spcAft>
-                        <a:buClrTx/>
-                        <a:buSzTx/>
-                        <a:buFontTx/>
-                        <a:buNone/>
-                        <a:tabLst/>
-                        <a:defRPr/>
-                      </a:pPr>
-                      <a:r>
-                        <a:rPr lang="en-DE" dirty="0"/>
-                        <a:t>160</a:t>
-                      </a:r>
-                    </a:p>
-                  </a:txBody>
-                  <a:tcPr>
-                    <a:solidFill>
-                      <a:schemeClr val="bg1">
-                        <a:lumMod val="75000"/>
-                        <a:alpha val="20000"/>
-                      </a:schemeClr>
-                    </a:solidFill>
-                  </a:tcPr>
-                </a:tc>
-                <a:tc>
-                  <a:txBody>
-                    <a:bodyPr/>
-                    <a:lstStyle/>
-                    <a:p>
-                      <a:pPr marL="0" marR="0" lvl="0" indent="0" algn="l" defTabSz="914400" rtl="0" eaLnBrk="1" fontAlgn="auto" latinLnBrk="0" hangingPunct="1">
-                        <a:lnSpc>
-                          <a:spcPct val="100000"/>
-                        </a:lnSpc>
-                        <a:spcBef>
-                          <a:spcPts val="0"/>
-                        </a:spcBef>
-                        <a:spcAft>
-                          <a:spcPts val="0"/>
-                        </a:spcAft>
-                        <a:buClrTx/>
-                        <a:buSzTx/>
-                        <a:buFontTx/>
-                        <a:buNone/>
-                        <a:tabLst/>
-                        <a:defRPr/>
-                      </a:pPr>
-                      <a:r>
-                        <a:rPr lang="en-GB" dirty="0"/>
-                        <a:t>…</a:t>
-                      </a:r>
-                      <a:endParaRPr lang="en-DE" dirty="0"/>
-                    </a:p>
-                  </a:txBody>
-                  <a:tcPr>
-                    <a:solidFill>
-                      <a:schemeClr val="bg1">
-                        <a:lumMod val="75000"/>
-                        <a:alpha val="20000"/>
-                      </a:schemeClr>
-                    </a:solidFill>
-                  </a:tcPr>
-                </a:tc>
-                <a:extLst>
-                  <a:ext uri="{0D108BD9-81ED-4DB2-BD59-A6C34878D82A}">
-                    <a16:rowId xmlns:a16="http://schemas.microsoft.com/office/drawing/2014/main" val="840994641"/>
-                  </a:ext>
-                </a:extLst>
-              </a:tr>
-              <a:tr h="370840">
-                <a:tc>
-                  <a:txBody>
-                    <a:bodyPr/>
-                    <a:lstStyle/>
-                    <a:p>
-                      <a:r>
-                        <a:rPr lang="en-GB" dirty="0">
-                          <a:solidFill>
-                            <a:srgbClr val="7030A0"/>
-                          </a:solidFill>
-                        </a:rPr>
-                        <a:t>BA.2</a:t>
-                      </a:r>
-                      <a:endParaRPr lang="en-DE" dirty="0">
-                        <a:solidFill>
-                          <a:srgbClr val="7030A0"/>
-                        </a:solidFill>
-                      </a:endParaRPr>
-                    </a:p>
-                  </a:txBody>
-                  <a:tcPr/>
-                </a:tc>
-                <a:tc>
-                  <a:txBody>
-                    <a:bodyPr/>
-                    <a:lstStyle/>
-                    <a:p>
-                      <a:r>
-                        <a:rPr lang="en-DE"/>
-                        <a:t>40</a:t>
-                      </a:r>
-                      <a:endParaRPr lang="en-DE" dirty="0"/>
-                    </a:p>
-                  </a:txBody>
-                  <a:tcPr/>
-                </a:tc>
-                <a:tc>
-                  <a:txBody>
-                    <a:bodyPr/>
-                    <a:lstStyle/>
-                    <a:p>
-                      <a:pPr marL="0" marR="0" lvl="0" indent="0" algn="l" defTabSz="914400" rtl="0" eaLnBrk="1" fontAlgn="auto" latinLnBrk="0" hangingPunct="1">
-                        <a:lnSpc>
-                          <a:spcPct val="100000"/>
-                        </a:lnSpc>
-                        <a:spcBef>
-                          <a:spcPts val="0"/>
-                        </a:spcBef>
-                        <a:spcAft>
-                          <a:spcPts val="0"/>
-                        </a:spcAft>
-                        <a:buClrTx/>
-                        <a:buSzTx/>
-                        <a:buFontTx/>
-                        <a:buNone/>
-                        <a:tabLst/>
-                        <a:defRPr/>
-                      </a:pPr>
-                      <a:r>
-                        <a:rPr lang="en-GB" dirty="0">
-                          <a:solidFill>
-                            <a:srgbClr val="FF0000"/>
-                          </a:solidFill>
-                        </a:rPr>
-                        <a:t>X</a:t>
-                      </a:r>
-                      <a:endParaRPr lang="en-DE" dirty="0">
-                        <a:solidFill>
-                          <a:srgbClr val="FF0000"/>
-                        </a:solidFill>
-                      </a:endParaRPr>
-                    </a:p>
-                  </a:txBody>
-                  <a:tcPr/>
-                </a:tc>
-                <a:tc>
-                  <a:txBody>
-                    <a:bodyPr/>
-                    <a:lstStyle/>
-                    <a:p>
-                      <a:pPr marL="0" marR="0" lvl="0" indent="0" algn="l" defTabSz="914400" rtl="0" eaLnBrk="1" fontAlgn="auto" latinLnBrk="0" hangingPunct="1">
-                        <a:lnSpc>
-                          <a:spcPct val="100000"/>
-                        </a:lnSpc>
-                        <a:spcBef>
-                          <a:spcPts val="0"/>
-                        </a:spcBef>
-                        <a:spcAft>
-                          <a:spcPts val="0"/>
-                        </a:spcAft>
-                        <a:buClrTx/>
-                        <a:buSzTx/>
-                        <a:buFontTx/>
-                        <a:buNone/>
-                        <a:tabLst/>
-                        <a:defRPr/>
-                      </a:pPr>
-                      <a:r>
-                        <a:rPr lang="en-GB" dirty="0"/>
-                        <a:t>…</a:t>
-                      </a:r>
-                      <a:endParaRPr lang="en-DE" dirty="0"/>
-                    </a:p>
-                  </a:txBody>
-                  <a:tcPr/>
-                </a:tc>
-                <a:extLst>
-                  <a:ext uri="{0D108BD9-81ED-4DB2-BD59-A6C34878D82A}">
-                    <a16:rowId xmlns:a16="http://schemas.microsoft.com/office/drawing/2014/main" val="2051936593"/>
-                  </a:ext>
-                </a:extLst>
-              </a:tr>
-              <a:tr h="370840">
-                <a:tc>
-                  <a:txBody>
-                    <a:bodyPr/>
-                    <a:lstStyle/>
-                    <a:p>
-                      <a:r>
-                        <a:rPr lang="en-GB" dirty="0">
-                          <a:solidFill>
-                            <a:srgbClr val="EA4D83"/>
-                          </a:solidFill>
-                        </a:rPr>
-                        <a:t>BA.5</a:t>
-                      </a:r>
-                      <a:endParaRPr lang="en-DE" dirty="0">
-                        <a:solidFill>
-                          <a:srgbClr val="EA4D83"/>
-                        </a:solidFill>
-                      </a:endParaRPr>
-                    </a:p>
-                  </a:txBody>
-                  <a:tcPr>
-                    <a:solidFill>
-                      <a:schemeClr val="bg1">
-                        <a:lumMod val="75000"/>
-                        <a:alpha val="20000"/>
-                      </a:schemeClr>
-                    </a:solidFill>
-                  </a:tcPr>
-                </a:tc>
-                <a:tc>
-                  <a:txBody>
-                    <a:bodyPr/>
-                    <a:lstStyle/>
-                    <a:p>
-                      <a:r>
-                        <a:rPr lang="en-DE" dirty="0"/>
-                        <a:t>80</a:t>
-                      </a:r>
-                    </a:p>
-                  </a:txBody>
-                  <a:tcPr>
-                    <a:solidFill>
-                      <a:schemeClr val="bg1">
-                        <a:lumMod val="75000"/>
-                        <a:alpha val="20000"/>
-                      </a:schemeClr>
-                    </a:solidFill>
-                  </a:tcPr>
-                </a:tc>
-                <a:tc>
-                  <a:txBody>
-                    <a:bodyPr/>
-                    <a:lstStyle/>
-                    <a:p>
-                      <a:r>
-                        <a:rPr lang="en-DE" dirty="0"/>
-                        <a:t>320</a:t>
-                      </a:r>
-                    </a:p>
-                  </a:txBody>
-                  <a:tcPr>
-                    <a:solidFill>
-                      <a:schemeClr val="bg1">
-                        <a:lumMod val="75000"/>
-                        <a:alpha val="20000"/>
-                      </a:schemeClr>
-                    </a:solidFill>
-                  </a:tcPr>
-                </a:tc>
-                <a:tc>
-                  <a:txBody>
-                    <a:bodyPr/>
-                    <a:lstStyle/>
-                    <a:p>
-                      <a:r>
-                        <a:rPr lang="en-GB" dirty="0"/>
-                        <a:t>…</a:t>
-                      </a:r>
-                      <a:endParaRPr lang="en-DE" dirty="0"/>
-                    </a:p>
-                  </a:txBody>
-                  <a:tcPr>
-                    <a:solidFill>
-                      <a:schemeClr val="bg1">
-                        <a:lumMod val="75000"/>
-                        <a:alpha val="20000"/>
-                      </a:schemeClr>
-                    </a:solidFill>
-                  </a:tcPr>
-                </a:tc>
-                <a:extLst>
-                  <a:ext uri="{0D108BD9-81ED-4DB2-BD59-A6C34878D82A}">
-                    <a16:rowId xmlns:a16="http://schemas.microsoft.com/office/drawing/2014/main" val="1541770388"/>
-                  </a:ext>
-                </a:extLst>
-              </a:tr>
-              <a:tr h="370840">
-                <a:tc>
-                  <a:txBody>
-                    <a:bodyPr/>
-                    <a:lstStyle/>
-                    <a:p>
-                      <a:r>
-                        <a:rPr lang="en-GB" dirty="0">
-                          <a:solidFill>
-                            <a:srgbClr val="7030A0"/>
-                          </a:solidFill>
-                        </a:rPr>
-                        <a:t>…</a:t>
-                      </a:r>
-                      <a:endParaRPr lang="en-DE" dirty="0">
-                        <a:solidFill>
-                          <a:srgbClr val="7030A0"/>
-                        </a:solidFill>
-                      </a:endParaRPr>
-                    </a:p>
-                  </a:txBody>
-                  <a:tcPr/>
-                </a:tc>
-                <a:tc>
-                  <a:txBody>
-                    <a:bodyPr/>
-                    <a:lstStyle/>
-                    <a:p>
-                      <a:r>
-                        <a:rPr lang="en-GB" dirty="0"/>
-                        <a:t>…</a:t>
-                      </a:r>
-                      <a:endParaRPr lang="en-DE" dirty="0"/>
-                    </a:p>
-                  </a:txBody>
-                  <a:tcPr/>
-                </a:tc>
-                <a:tc>
-                  <a:txBody>
-                    <a:bodyPr/>
-                    <a:lstStyle/>
-                    <a:p>
-                      <a:pPr marL="0" marR="0" lvl="0" indent="0" algn="l" defTabSz="914400" rtl="0" eaLnBrk="1" fontAlgn="auto" latinLnBrk="0" hangingPunct="1">
-                        <a:lnSpc>
-                          <a:spcPct val="100000"/>
-                        </a:lnSpc>
-                        <a:spcBef>
-                          <a:spcPts val="0"/>
-                        </a:spcBef>
-                        <a:spcAft>
-                          <a:spcPts val="0"/>
-                        </a:spcAft>
-                        <a:buClrTx/>
-                        <a:buSzTx/>
-                        <a:buFontTx/>
-                        <a:buNone/>
-                        <a:tabLst/>
-                        <a:defRPr/>
-                      </a:pPr>
-                      <a:r>
-                        <a:rPr lang="en-GB" dirty="0"/>
-                        <a:t>…</a:t>
-                      </a:r>
-                      <a:endParaRPr lang="en-DE" dirty="0"/>
-                    </a:p>
-                  </a:txBody>
-                  <a:tcPr/>
-                </a:tc>
-                <a:tc>
-                  <a:txBody>
-                    <a:bodyPr/>
-                    <a:lstStyle/>
-                    <a:p>
-                      <a:pPr marL="0" marR="0" lvl="0" indent="0" algn="l" defTabSz="914400" rtl="0" eaLnBrk="1" fontAlgn="auto" latinLnBrk="0" hangingPunct="1">
-                        <a:lnSpc>
-                          <a:spcPct val="100000"/>
-                        </a:lnSpc>
-                        <a:spcBef>
-                          <a:spcPts val="0"/>
-                        </a:spcBef>
-                        <a:spcAft>
-                          <a:spcPts val="0"/>
-                        </a:spcAft>
-                        <a:buClrTx/>
-                        <a:buSzTx/>
-                        <a:buFontTx/>
-                        <a:buNone/>
-                        <a:tabLst/>
-                        <a:defRPr/>
-                      </a:pPr>
-                      <a:endParaRPr lang="en-DE" dirty="0"/>
-                    </a:p>
-                  </a:txBody>
-                  <a:tcPr/>
-                </a:tc>
-                <a:extLst>
-                  <a:ext uri="{0D108BD9-81ED-4DB2-BD59-A6C34878D82A}">
-                    <a16:rowId xmlns:a16="http://schemas.microsoft.com/office/drawing/2014/main" val="3388985870"/>
-                  </a:ext>
-                </a:extLst>
-              </a:tr>
-            </a:tbl>
-          </a:graphicData>
-        </a:graphic>
-      </p:graphicFrame>
-      <p:pic>
-        <p:nvPicPr>
-          <p:cNvPr id="6" name="Picture 5" descr="A grid with dots and squares&#10;&#10;Description automatically generated">
-            <a:extLst>
-              <a:ext uri="{FF2B5EF4-FFF2-40B4-BE49-F238E27FC236}">
-                <a16:creationId xmlns:a16="http://schemas.microsoft.com/office/drawing/2014/main" id="{8890A10E-F16C-3A92-E30B-58BEF840CB93}"/>
-              </a:ext>
-            </a:extLst>
-          </p:cNvPr>
-          <p:cNvPicPr>
-            <a:picLocks noChangeAspect="1"/>
-          </p:cNvPicPr>
-          <p:nvPr/>
-        </p:nvPicPr>
-        <p:blipFill>
-          <a:blip r:embed="rId2"/>
-          <a:stretch>
-            <a:fillRect/>
-          </a:stretch>
-        </p:blipFill>
-        <p:spPr>
-          <a:xfrm>
-            <a:off x="7635423" y="792480"/>
-            <a:ext cx="4353989" cy="5425440"/>
-          </a:xfrm>
-          <a:prstGeom prst="rect">
-            <a:avLst/>
-          </a:prstGeom>
-        </p:spPr>
-      </p:pic>
-      <p:cxnSp>
-        <p:nvCxnSpPr>
-          <p:cNvPr id="8" name="Straight Arrow Connector 7">
-            <a:extLst>
-              <a:ext uri="{FF2B5EF4-FFF2-40B4-BE49-F238E27FC236}">
-                <a16:creationId xmlns:a16="http://schemas.microsoft.com/office/drawing/2014/main" id="{4DA0EFDC-E869-266C-F95D-587878E645E7}"/>
-              </a:ext>
-            </a:extLst>
-          </p:cNvPr>
-          <p:cNvCxnSpPr/>
-          <p:nvPr/>
-        </p:nvCxnSpPr>
-        <p:spPr>
-          <a:xfrm>
-            <a:off x="6146800" y="2082800"/>
-            <a:ext cx="1351280" cy="0"/>
-          </a:xfrm>
-          <a:prstGeom prst="straightConnector1">
-            <a:avLst/>
-          </a:prstGeom>
-          <a:ln w="28575">
-            <a:solidFill>
-              <a:schemeClr val="tx1"/>
-            </a:solidFill>
-            <a:tailEnd type="triangle"/>
-          </a:ln>
-        </p:spPr>
-        <p:style>
-          <a:lnRef idx="2">
-            <a:schemeClr val="accent1"/>
-          </a:lnRef>
-          <a:fillRef idx="0">
-            <a:schemeClr val="accent1"/>
-          </a:fillRef>
-          <a:effectRef idx="1">
-            <a:schemeClr val="accent1"/>
-          </a:effectRef>
-          <a:fontRef idx="minor">
-            <a:schemeClr val="tx1"/>
-          </a:fontRef>
-        </p:style>
-      </p:cxnSp>
-      <p:sp>
-        <p:nvSpPr>
-          <p:cNvPr id="10" name="TextBox 9">
-            <a:extLst>
-              <a:ext uri="{FF2B5EF4-FFF2-40B4-BE49-F238E27FC236}">
-                <a16:creationId xmlns:a16="http://schemas.microsoft.com/office/drawing/2014/main" id="{383602A5-8753-2DDC-BC69-BD225545C5D2}"/>
-              </a:ext>
-            </a:extLst>
-          </p:cNvPr>
-          <p:cNvSpPr txBox="1"/>
-          <p:nvPr/>
-        </p:nvSpPr>
-        <p:spPr>
-          <a:xfrm>
-            <a:off x="8092440" y="2827774"/>
-            <a:ext cx="695960" cy="369332"/>
-          </a:xfrm>
-          <a:prstGeom prst="rect">
-            <a:avLst/>
-          </a:prstGeom>
-          <a:noFill/>
-        </p:spPr>
-        <p:txBody>
-          <a:bodyPr wrap="square">
-            <a:spAutoFit/>
-          </a:bodyPr>
-          <a:lstStyle/>
-          <a:p>
-            <a:r>
-              <a:rPr lang="en-GB" dirty="0">
-                <a:solidFill>
-                  <a:schemeClr val="tx2">
-                    <a:lumMod val="75000"/>
-                    <a:lumOff val="25000"/>
-                  </a:schemeClr>
-                </a:solidFill>
-              </a:rPr>
-              <a:t>Wu1</a:t>
-            </a:r>
-            <a:endParaRPr lang="en-US" dirty="0">
-              <a:solidFill>
-                <a:schemeClr val="tx2">
-                  <a:lumMod val="75000"/>
-                  <a:lumOff val="25000"/>
-                </a:schemeClr>
-              </a:solidFill>
-            </a:endParaRPr>
-          </a:p>
-        </p:txBody>
-      </p:sp>
-      <p:sp>
-        <p:nvSpPr>
-          <p:cNvPr id="12" name="TextBox 11">
-            <a:extLst>
-              <a:ext uri="{FF2B5EF4-FFF2-40B4-BE49-F238E27FC236}">
-                <a16:creationId xmlns:a16="http://schemas.microsoft.com/office/drawing/2014/main" id="{49463118-A6B8-5B09-D8B0-180E12D87857}"/>
-              </a:ext>
-            </a:extLst>
-          </p:cNvPr>
-          <p:cNvSpPr txBox="1"/>
-          <p:nvPr/>
-        </p:nvSpPr>
-        <p:spPr>
-          <a:xfrm>
-            <a:off x="9044940" y="3691374"/>
-            <a:ext cx="657860" cy="369332"/>
-          </a:xfrm>
-          <a:prstGeom prst="rect">
-            <a:avLst/>
-          </a:prstGeom>
-          <a:noFill/>
-        </p:spPr>
-        <p:txBody>
-          <a:bodyPr wrap="square">
-            <a:spAutoFit/>
-          </a:bodyPr>
-          <a:lstStyle/>
-          <a:p>
-            <a:r>
-              <a:rPr lang="en-GB" dirty="0">
-                <a:solidFill>
-                  <a:srgbClr val="7030A0"/>
-                </a:solidFill>
-              </a:rPr>
-              <a:t>BA.2</a:t>
-            </a:r>
-            <a:endParaRPr lang="en-US" dirty="0"/>
-          </a:p>
-        </p:txBody>
-      </p:sp>
-      <p:sp>
-        <p:nvSpPr>
-          <p:cNvPr id="14" name="TextBox 13">
-            <a:extLst>
-              <a:ext uri="{FF2B5EF4-FFF2-40B4-BE49-F238E27FC236}">
-                <a16:creationId xmlns:a16="http://schemas.microsoft.com/office/drawing/2014/main" id="{E9ED2004-6ADD-B056-F6DB-830EF0BD82A4}"/>
-              </a:ext>
-            </a:extLst>
-          </p:cNvPr>
-          <p:cNvSpPr txBox="1"/>
-          <p:nvPr/>
-        </p:nvSpPr>
-        <p:spPr>
-          <a:xfrm>
-            <a:off x="9278620" y="3088640"/>
-            <a:ext cx="718820" cy="369332"/>
-          </a:xfrm>
-          <a:prstGeom prst="rect">
-            <a:avLst/>
-          </a:prstGeom>
-          <a:noFill/>
-        </p:spPr>
-        <p:txBody>
-          <a:bodyPr wrap="square">
-            <a:spAutoFit/>
-          </a:bodyPr>
-          <a:lstStyle/>
-          <a:p>
-            <a:r>
-              <a:rPr lang="en-GB" dirty="0">
-                <a:solidFill>
-                  <a:srgbClr val="EA4D83"/>
-                </a:solidFill>
-              </a:rPr>
-              <a:t>BA.5</a:t>
-            </a:r>
-            <a:endParaRPr lang="en-DE" dirty="0">
-              <a:solidFill>
-                <a:srgbClr val="EA4D83"/>
-              </a:solidFill>
-            </a:endParaRPr>
-          </a:p>
-        </p:txBody>
-      </p:sp>
-      <p:sp>
-        <p:nvSpPr>
-          <p:cNvPr id="15" name="TextBox 14">
-            <a:extLst>
-              <a:ext uri="{FF2B5EF4-FFF2-40B4-BE49-F238E27FC236}">
-                <a16:creationId xmlns:a16="http://schemas.microsoft.com/office/drawing/2014/main" id="{E732C92F-5A68-3A5A-CD4A-B0C235AF62E3}"/>
-              </a:ext>
-            </a:extLst>
-          </p:cNvPr>
-          <p:cNvSpPr txBox="1"/>
-          <p:nvPr/>
-        </p:nvSpPr>
-        <p:spPr>
-          <a:xfrm>
-            <a:off x="436880" y="1107440"/>
-            <a:ext cx="1178592" cy="369332"/>
-          </a:xfrm>
-          <a:prstGeom prst="rect">
-            <a:avLst/>
-          </a:prstGeom>
-          <a:noFill/>
-        </p:spPr>
-        <p:txBody>
-          <a:bodyPr wrap="none" rtlCol="0">
-            <a:spAutoFit/>
-          </a:bodyPr>
-          <a:lstStyle/>
-          <a:p>
-            <a:r>
-              <a:rPr lang="en-US" dirty="0"/>
-              <a:t>Measured</a:t>
-            </a:r>
-          </a:p>
-        </p:txBody>
-      </p:sp>
-      <p:graphicFrame>
-        <p:nvGraphicFramePr>
-          <p:cNvPr id="18" name="Table 4">
-            <a:extLst>
-              <a:ext uri="{FF2B5EF4-FFF2-40B4-BE49-F238E27FC236}">
-                <a16:creationId xmlns:a16="http://schemas.microsoft.com/office/drawing/2014/main" id="{E63632B7-A105-D8E8-88E8-8547641B6635}"/>
-              </a:ext>
-            </a:extLst>
-          </p:cNvPr>
-          <p:cNvGraphicFramePr>
-            <a:graphicFrameLocks noGrp="1"/>
-          </p:cNvGraphicFramePr>
-          <p:nvPr/>
-        </p:nvGraphicFramePr>
-        <p:xfrm>
-          <a:off x="566108" y="3978906"/>
-          <a:ext cx="5468932" cy="1854200"/>
-        </p:xfrm>
-        <a:graphic>
-          <a:graphicData uri="http://schemas.openxmlformats.org/drawingml/2006/table">
-            <a:tbl>
-              <a:tblPr firstRow="1" bandRow="1">
-                <a:tableStyleId>{9D7B26C5-4107-4FEC-AEDC-1716B250A1EF}</a:tableStyleId>
-              </a:tblPr>
-              <a:tblGrid>
-                <a:gridCol w="1800439">
-                  <a:extLst>
-                    <a:ext uri="{9D8B030D-6E8A-4147-A177-3AD203B41FA5}">
-                      <a16:colId xmlns:a16="http://schemas.microsoft.com/office/drawing/2014/main" val="2351268341"/>
-                    </a:ext>
-                  </a:extLst>
-                </a:gridCol>
-                <a:gridCol w="1073349">
-                  <a:extLst>
-                    <a:ext uri="{9D8B030D-6E8A-4147-A177-3AD203B41FA5}">
-                      <a16:colId xmlns:a16="http://schemas.microsoft.com/office/drawing/2014/main" val="3051075737"/>
-                    </a:ext>
-                  </a:extLst>
-                </a:gridCol>
-                <a:gridCol w="1297572">
-                  <a:extLst>
-                    <a:ext uri="{9D8B030D-6E8A-4147-A177-3AD203B41FA5}">
-                      <a16:colId xmlns:a16="http://schemas.microsoft.com/office/drawing/2014/main" val="2719525100"/>
-                    </a:ext>
-                  </a:extLst>
-                </a:gridCol>
-                <a:gridCol w="1297572">
-                  <a:extLst>
-                    <a:ext uri="{9D8B030D-6E8A-4147-A177-3AD203B41FA5}">
-                      <a16:colId xmlns:a16="http://schemas.microsoft.com/office/drawing/2014/main" val="1312788050"/>
-                    </a:ext>
-                  </a:extLst>
-                </a:gridCol>
-              </a:tblGrid>
-              <a:tr h="370840">
-                <a:tc>
-                  <a:txBody>
-                    <a:bodyPr/>
-                    <a:lstStyle/>
-                    <a:p>
-                      <a:endParaRPr lang="en-DE"/>
-                    </a:p>
-                  </a:txBody>
-                  <a:tcPr/>
-                </a:tc>
-                <a:tc>
-                  <a:txBody>
-                    <a:bodyPr/>
-                    <a:lstStyle/>
-                    <a:p>
-                      <a:pPr marL="0" marR="0" lvl="0" indent="0" algn="l" defTabSz="914400" rtl="0" eaLnBrk="1" fontAlgn="auto" latinLnBrk="0" hangingPunct="1">
-                        <a:lnSpc>
-                          <a:spcPct val="100000"/>
-                        </a:lnSpc>
-                        <a:spcBef>
-                          <a:spcPts val="0"/>
-                        </a:spcBef>
-                        <a:spcAft>
-                          <a:spcPts val="0"/>
-                        </a:spcAft>
-                        <a:buClrTx/>
-                        <a:buSzTx/>
-                        <a:buFontTx/>
-                        <a:buNone/>
-                        <a:tabLst/>
-                        <a:defRPr/>
-                      </a:pPr>
-                      <a:r>
-                        <a:rPr lang="en-GB" b="0" dirty="0">
-                          <a:solidFill>
-                            <a:sysClr val="windowText" lastClr="000000"/>
-                          </a:solidFill>
-                        </a:rPr>
-                        <a:t>SR: Wu1</a:t>
-                      </a:r>
-                      <a:endParaRPr lang="en-DE" b="0" dirty="0">
-                        <a:solidFill>
-                          <a:sysClr val="windowText" lastClr="000000"/>
-                        </a:solidFill>
-                      </a:endParaRPr>
-                    </a:p>
-                  </a:txBody>
-                  <a:tcPr/>
-                </a:tc>
-                <a:tc>
-                  <a:txBody>
-                    <a:bodyPr/>
-                    <a:lstStyle/>
-                    <a:p>
-                      <a:pPr marL="0" marR="0" lvl="0" indent="0" algn="l" defTabSz="914400" rtl="0" eaLnBrk="1" fontAlgn="auto" latinLnBrk="0" hangingPunct="1">
-                        <a:lnSpc>
-                          <a:spcPct val="100000"/>
-                        </a:lnSpc>
-                        <a:spcBef>
-                          <a:spcPts val="0"/>
-                        </a:spcBef>
-                        <a:spcAft>
-                          <a:spcPts val="0"/>
-                        </a:spcAft>
-                        <a:buClrTx/>
-                        <a:buSzTx/>
-                        <a:buFontTx/>
-                        <a:buNone/>
-                        <a:tabLst/>
-                        <a:defRPr/>
-                      </a:pPr>
-                      <a:r>
-                        <a:rPr lang="en-GB" b="0" dirty="0">
-                          <a:solidFill>
-                            <a:sysClr val="windowText" lastClr="000000"/>
-                          </a:solidFill>
-                        </a:rPr>
-                        <a:t>SR: BA.1</a:t>
-                      </a:r>
-                      <a:endParaRPr lang="en-DE" b="0">
-                        <a:solidFill>
-                          <a:sysClr val="windowText" lastClr="000000"/>
-                        </a:solidFill>
-                      </a:endParaRPr>
-                    </a:p>
-                  </a:txBody>
-                  <a:tcPr/>
-                </a:tc>
-                <a:tc>
-                  <a:txBody>
-                    <a:bodyPr/>
-                    <a:lstStyle/>
-                    <a:p>
-                      <a:pPr marL="0" marR="0" lvl="0" indent="0" algn="l" defTabSz="914400" rtl="0" eaLnBrk="1" fontAlgn="auto" latinLnBrk="0" hangingPunct="1">
-                        <a:lnSpc>
-                          <a:spcPct val="100000"/>
-                        </a:lnSpc>
-                        <a:spcBef>
-                          <a:spcPts val="0"/>
-                        </a:spcBef>
-                        <a:spcAft>
-                          <a:spcPts val="0"/>
-                        </a:spcAft>
-                        <a:buClrTx/>
-                        <a:buSzTx/>
-                        <a:buFontTx/>
-                        <a:buNone/>
-                        <a:tabLst/>
-                        <a:defRPr/>
-                      </a:pPr>
-                      <a:r>
-                        <a:rPr lang="en-GB" b="0" dirty="0">
-                          <a:solidFill>
-                            <a:sysClr val="windowText" lastClr="000000"/>
-                          </a:solidFill>
-                        </a:rPr>
-                        <a:t>…</a:t>
-                      </a:r>
-                      <a:endParaRPr lang="en-DE" b="0">
-                        <a:solidFill>
-                          <a:sysClr val="windowText" lastClr="000000"/>
-                        </a:solidFill>
-                      </a:endParaRPr>
-                    </a:p>
-                  </a:txBody>
-                  <a:tcPr/>
-                </a:tc>
-                <a:extLst>
-                  <a:ext uri="{0D108BD9-81ED-4DB2-BD59-A6C34878D82A}">
-                    <a16:rowId xmlns:a16="http://schemas.microsoft.com/office/drawing/2014/main" val="3871534099"/>
-                  </a:ext>
-                </a:extLst>
-              </a:tr>
-              <a:tr h="370840">
-                <a:tc>
-                  <a:txBody>
-                    <a:bodyPr/>
-                    <a:lstStyle/>
-                    <a:p>
-                      <a:pPr marL="0" marR="0" lvl="0" indent="0" algn="l" defTabSz="914400" rtl="0" eaLnBrk="1" fontAlgn="auto" latinLnBrk="0" hangingPunct="1">
-                        <a:lnSpc>
-                          <a:spcPct val="100000"/>
-                        </a:lnSpc>
-                        <a:spcBef>
-                          <a:spcPts val="0"/>
-                        </a:spcBef>
-                        <a:spcAft>
-                          <a:spcPts val="0"/>
-                        </a:spcAft>
-                        <a:buClrTx/>
-                        <a:buSzTx/>
-                        <a:buFontTx/>
-                        <a:buNone/>
-                        <a:tabLst/>
-                        <a:defRPr/>
-                      </a:pPr>
-                      <a:r>
-                        <a:rPr lang="en-GB" dirty="0">
-                          <a:solidFill>
-                            <a:schemeClr val="tx2">
-                              <a:lumMod val="75000"/>
-                              <a:lumOff val="25000"/>
-                            </a:schemeClr>
-                          </a:solidFill>
-                        </a:rPr>
-                        <a:t>Wu1</a:t>
-                      </a:r>
-                      <a:endParaRPr lang="en-DE" dirty="0">
-                        <a:solidFill>
-                          <a:schemeClr val="tx2">
-                            <a:lumMod val="75000"/>
-                            <a:lumOff val="25000"/>
-                          </a:schemeClr>
-                        </a:solidFill>
-                      </a:endParaRPr>
-                    </a:p>
-                  </a:txBody>
-                  <a:tcPr>
-                    <a:solidFill>
-                      <a:schemeClr val="bg1">
-                        <a:lumMod val="75000"/>
-                        <a:alpha val="20000"/>
-                      </a:schemeClr>
-                    </a:solidFill>
-                  </a:tcPr>
-                </a:tc>
-                <a:tc>
-                  <a:txBody>
-                    <a:bodyPr/>
-                    <a:lstStyle/>
-                    <a:p>
-                      <a:r>
-                        <a:rPr lang="en-DE"/>
-                        <a:t>1</a:t>
-                      </a:r>
-                      <a:r>
-                        <a:rPr lang="en-GB" dirty="0"/>
-                        <a:t>58</a:t>
-                      </a:r>
-                      <a:endParaRPr lang="en-DE" dirty="0"/>
-                    </a:p>
-                  </a:txBody>
-                  <a:tcPr>
-                    <a:solidFill>
-                      <a:schemeClr val="bg1">
-                        <a:lumMod val="75000"/>
-                        <a:alpha val="20000"/>
-                      </a:schemeClr>
-                    </a:solidFill>
-                  </a:tcPr>
-                </a:tc>
-                <a:tc>
-                  <a:txBody>
-                    <a:bodyPr/>
-                    <a:lstStyle/>
-                    <a:p>
-                      <a:pPr marL="0" marR="0" lvl="0" indent="0" algn="l" defTabSz="914400" rtl="0" eaLnBrk="1" fontAlgn="auto" latinLnBrk="0" hangingPunct="1">
-                        <a:lnSpc>
-                          <a:spcPct val="100000"/>
-                        </a:lnSpc>
-                        <a:spcBef>
-                          <a:spcPts val="0"/>
-                        </a:spcBef>
-                        <a:spcAft>
-                          <a:spcPts val="0"/>
-                        </a:spcAft>
-                        <a:buClrTx/>
-                        <a:buSzTx/>
-                        <a:buFontTx/>
-                        <a:buNone/>
-                        <a:tabLst/>
-                        <a:defRPr/>
-                      </a:pPr>
-                      <a:r>
-                        <a:rPr lang="en-GB" dirty="0"/>
-                        <a:t>134</a:t>
-                      </a:r>
-                      <a:endParaRPr lang="en-DE" dirty="0"/>
-                    </a:p>
-                  </a:txBody>
-                  <a:tcPr>
-                    <a:solidFill>
-                      <a:schemeClr val="bg1">
-                        <a:lumMod val="75000"/>
-                        <a:alpha val="20000"/>
-                      </a:schemeClr>
-                    </a:solidFill>
-                  </a:tcPr>
-                </a:tc>
-                <a:tc>
-                  <a:txBody>
-                    <a:bodyPr/>
-                    <a:lstStyle/>
-                    <a:p>
-                      <a:pPr marL="0" marR="0" lvl="0" indent="0" algn="l" defTabSz="914400" rtl="0" eaLnBrk="1" fontAlgn="auto" latinLnBrk="0" hangingPunct="1">
-                        <a:lnSpc>
-                          <a:spcPct val="100000"/>
-                        </a:lnSpc>
-                        <a:spcBef>
-                          <a:spcPts val="0"/>
-                        </a:spcBef>
-                        <a:spcAft>
-                          <a:spcPts val="0"/>
-                        </a:spcAft>
-                        <a:buClrTx/>
-                        <a:buSzTx/>
-                        <a:buFontTx/>
-                        <a:buNone/>
-                        <a:tabLst/>
-                        <a:defRPr/>
-                      </a:pPr>
-                      <a:r>
-                        <a:rPr lang="en-GB" dirty="0"/>
-                        <a:t>…</a:t>
-                      </a:r>
-                      <a:endParaRPr lang="en-DE" dirty="0"/>
-                    </a:p>
-                  </a:txBody>
-                  <a:tcPr>
-                    <a:solidFill>
-                      <a:schemeClr val="bg1">
-                        <a:lumMod val="75000"/>
-                        <a:alpha val="20000"/>
-                      </a:schemeClr>
-                    </a:solidFill>
-                  </a:tcPr>
-                </a:tc>
-                <a:extLst>
-                  <a:ext uri="{0D108BD9-81ED-4DB2-BD59-A6C34878D82A}">
-                    <a16:rowId xmlns:a16="http://schemas.microsoft.com/office/drawing/2014/main" val="840994641"/>
-                  </a:ext>
-                </a:extLst>
-              </a:tr>
-              <a:tr h="370840">
-                <a:tc>
-                  <a:txBody>
-                    <a:bodyPr/>
-                    <a:lstStyle/>
-                    <a:p>
-                      <a:r>
-                        <a:rPr lang="en-GB" dirty="0">
-                          <a:solidFill>
-                            <a:srgbClr val="7030A0"/>
-                          </a:solidFill>
-                        </a:rPr>
-                        <a:t>BA.2</a:t>
-                      </a:r>
-                      <a:endParaRPr lang="en-DE" dirty="0">
-                        <a:solidFill>
-                          <a:srgbClr val="7030A0"/>
-                        </a:solidFill>
-                      </a:endParaRPr>
-                    </a:p>
-                  </a:txBody>
-                  <a:tcPr/>
-                </a:tc>
-                <a:tc>
-                  <a:txBody>
-                    <a:bodyPr/>
-                    <a:lstStyle/>
-                    <a:p>
-                      <a:r>
-                        <a:rPr lang="en-GB" dirty="0"/>
-                        <a:t>54</a:t>
-                      </a:r>
-                      <a:endParaRPr lang="en-DE" dirty="0"/>
-                    </a:p>
-                  </a:txBody>
-                  <a:tcPr/>
-                </a:tc>
-                <a:tc>
-                  <a:txBody>
-                    <a:bodyPr/>
-                    <a:lstStyle/>
-                    <a:p>
-                      <a:pPr marL="0" marR="0" lvl="0" indent="0" algn="l" defTabSz="914400" rtl="0" eaLnBrk="1" fontAlgn="auto" latinLnBrk="0" hangingPunct="1">
-                        <a:lnSpc>
-                          <a:spcPct val="100000"/>
-                        </a:lnSpc>
-                        <a:spcBef>
-                          <a:spcPts val="0"/>
-                        </a:spcBef>
-                        <a:spcAft>
-                          <a:spcPts val="0"/>
-                        </a:spcAft>
-                        <a:buClrTx/>
-                        <a:buSzTx/>
-                        <a:buFontTx/>
-                        <a:buNone/>
-                        <a:tabLst/>
-                        <a:defRPr/>
-                      </a:pPr>
-                      <a:r>
-                        <a:rPr lang="en-GB" dirty="0">
-                          <a:solidFill>
-                            <a:srgbClr val="FF0000"/>
-                          </a:solidFill>
-                        </a:rPr>
-                        <a:t>72</a:t>
-                      </a:r>
-                      <a:endParaRPr lang="en-DE" dirty="0">
-                        <a:solidFill>
-                          <a:srgbClr val="FF0000"/>
-                        </a:solidFill>
-                      </a:endParaRPr>
-                    </a:p>
-                  </a:txBody>
-                  <a:tcPr/>
-                </a:tc>
-                <a:tc>
-                  <a:txBody>
-                    <a:bodyPr/>
-                    <a:lstStyle/>
-                    <a:p>
-                      <a:pPr marL="0" marR="0" lvl="0" indent="0" algn="l" defTabSz="914400" rtl="0" eaLnBrk="1" fontAlgn="auto" latinLnBrk="0" hangingPunct="1">
-                        <a:lnSpc>
-                          <a:spcPct val="100000"/>
-                        </a:lnSpc>
-                        <a:spcBef>
-                          <a:spcPts val="0"/>
-                        </a:spcBef>
-                        <a:spcAft>
-                          <a:spcPts val="0"/>
-                        </a:spcAft>
-                        <a:buClrTx/>
-                        <a:buSzTx/>
-                        <a:buFontTx/>
-                        <a:buNone/>
-                        <a:tabLst/>
-                        <a:defRPr/>
-                      </a:pPr>
-                      <a:r>
-                        <a:rPr lang="en-GB" dirty="0"/>
-                        <a:t>…</a:t>
-                      </a:r>
-                      <a:endParaRPr lang="en-DE" dirty="0"/>
-                    </a:p>
-                  </a:txBody>
-                  <a:tcPr/>
-                </a:tc>
-                <a:extLst>
-                  <a:ext uri="{0D108BD9-81ED-4DB2-BD59-A6C34878D82A}">
-                    <a16:rowId xmlns:a16="http://schemas.microsoft.com/office/drawing/2014/main" val="2051936593"/>
-                  </a:ext>
-                </a:extLst>
-              </a:tr>
-              <a:tr h="370840">
-                <a:tc>
-                  <a:txBody>
-                    <a:bodyPr/>
-                    <a:lstStyle/>
-                    <a:p>
-                      <a:r>
-                        <a:rPr lang="en-GB" dirty="0">
-                          <a:solidFill>
-                            <a:srgbClr val="EA4D83"/>
-                          </a:solidFill>
-                        </a:rPr>
-                        <a:t>BA.5</a:t>
-                      </a:r>
-                      <a:endParaRPr lang="en-DE" dirty="0">
-                        <a:solidFill>
-                          <a:srgbClr val="EA4D83"/>
-                        </a:solidFill>
-                      </a:endParaRPr>
-                    </a:p>
-                  </a:txBody>
-                  <a:tcPr>
-                    <a:solidFill>
-                      <a:schemeClr val="bg1">
-                        <a:lumMod val="75000"/>
-                        <a:alpha val="20000"/>
-                      </a:schemeClr>
-                    </a:solidFill>
-                  </a:tcPr>
-                </a:tc>
-                <a:tc>
-                  <a:txBody>
-                    <a:bodyPr/>
-                    <a:lstStyle/>
-                    <a:p>
-                      <a:r>
-                        <a:rPr lang="en-GB" dirty="0"/>
-                        <a:t>98</a:t>
-                      </a:r>
-                      <a:endParaRPr lang="en-DE" dirty="0"/>
-                    </a:p>
-                  </a:txBody>
-                  <a:tcPr>
-                    <a:solidFill>
-                      <a:schemeClr val="bg1">
-                        <a:lumMod val="75000"/>
-                        <a:alpha val="20000"/>
-                      </a:schemeClr>
-                    </a:solidFill>
-                  </a:tcPr>
-                </a:tc>
-                <a:tc>
-                  <a:txBody>
-                    <a:bodyPr/>
-                    <a:lstStyle/>
-                    <a:p>
-                      <a:r>
-                        <a:rPr lang="en-GB" dirty="0"/>
-                        <a:t>345</a:t>
-                      </a:r>
-                      <a:endParaRPr lang="en-DE" dirty="0"/>
-                    </a:p>
-                  </a:txBody>
-                  <a:tcPr>
-                    <a:solidFill>
-                      <a:schemeClr val="bg1">
-                        <a:lumMod val="75000"/>
-                        <a:alpha val="20000"/>
-                      </a:schemeClr>
-                    </a:solidFill>
-                  </a:tcPr>
-                </a:tc>
-                <a:tc>
-                  <a:txBody>
-                    <a:bodyPr/>
-                    <a:lstStyle/>
-                    <a:p>
-                      <a:r>
-                        <a:rPr lang="en-GB" dirty="0"/>
-                        <a:t>…</a:t>
-                      </a:r>
-                      <a:endParaRPr lang="en-DE" dirty="0"/>
-                    </a:p>
-                  </a:txBody>
-                  <a:tcPr>
-                    <a:solidFill>
-                      <a:schemeClr val="bg1">
-                        <a:lumMod val="75000"/>
-                        <a:alpha val="20000"/>
-                      </a:schemeClr>
-                    </a:solidFill>
-                  </a:tcPr>
-                </a:tc>
-                <a:extLst>
-                  <a:ext uri="{0D108BD9-81ED-4DB2-BD59-A6C34878D82A}">
-                    <a16:rowId xmlns:a16="http://schemas.microsoft.com/office/drawing/2014/main" val="1541770388"/>
-                  </a:ext>
-                </a:extLst>
-              </a:tr>
-              <a:tr h="370840">
-                <a:tc>
-                  <a:txBody>
-                    <a:bodyPr/>
-                    <a:lstStyle/>
-                    <a:p>
-                      <a:r>
-                        <a:rPr lang="en-GB" dirty="0">
-                          <a:solidFill>
-                            <a:srgbClr val="7030A0"/>
-                          </a:solidFill>
-                        </a:rPr>
-                        <a:t>…</a:t>
-                      </a:r>
-                      <a:endParaRPr lang="en-DE" dirty="0">
-                        <a:solidFill>
-                          <a:srgbClr val="7030A0"/>
-                        </a:solidFill>
-                      </a:endParaRPr>
-                    </a:p>
-                  </a:txBody>
-                  <a:tcPr/>
-                </a:tc>
-                <a:tc>
-                  <a:txBody>
-                    <a:bodyPr/>
-                    <a:lstStyle/>
-                    <a:p>
-                      <a:r>
-                        <a:rPr lang="en-GB" dirty="0"/>
-                        <a:t>…</a:t>
-                      </a:r>
-                      <a:endParaRPr lang="en-DE" dirty="0"/>
-                    </a:p>
-                  </a:txBody>
-                  <a:tcPr/>
-                </a:tc>
-                <a:tc>
-                  <a:txBody>
-                    <a:bodyPr/>
-                    <a:lstStyle/>
-                    <a:p>
-                      <a:pPr marL="0" marR="0" lvl="0" indent="0" algn="l" defTabSz="914400" rtl="0" eaLnBrk="1" fontAlgn="auto" latinLnBrk="0" hangingPunct="1">
-                        <a:lnSpc>
-                          <a:spcPct val="100000"/>
-                        </a:lnSpc>
-                        <a:spcBef>
-                          <a:spcPts val="0"/>
-                        </a:spcBef>
-                        <a:spcAft>
-                          <a:spcPts val="0"/>
-                        </a:spcAft>
-                        <a:buClrTx/>
-                        <a:buSzTx/>
-                        <a:buFontTx/>
-                        <a:buNone/>
-                        <a:tabLst/>
-                        <a:defRPr/>
-                      </a:pPr>
-                      <a:r>
-                        <a:rPr lang="en-GB" dirty="0"/>
-                        <a:t>…</a:t>
-                      </a:r>
-                      <a:endParaRPr lang="en-DE" dirty="0"/>
-                    </a:p>
-                  </a:txBody>
-                  <a:tcPr/>
-                </a:tc>
-                <a:tc>
-                  <a:txBody>
-                    <a:bodyPr/>
-                    <a:lstStyle/>
-                    <a:p>
-                      <a:pPr marL="0" marR="0" lvl="0" indent="0" algn="l" defTabSz="914400" rtl="0" eaLnBrk="1" fontAlgn="auto" latinLnBrk="0" hangingPunct="1">
-                        <a:lnSpc>
-                          <a:spcPct val="100000"/>
-                        </a:lnSpc>
-                        <a:spcBef>
-                          <a:spcPts val="0"/>
-                        </a:spcBef>
-                        <a:spcAft>
-                          <a:spcPts val="0"/>
-                        </a:spcAft>
-                        <a:buClrTx/>
-                        <a:buSzTx/>
-                        <a:buFontTx/>
-                        <a:buNone/>
-                        <a:tabLst/>
-                        <a:defRPr/>
-                      </a:pPr>
-                      <a:endParaRPr lang="en-DE" dirty="0"/>
-                    </a:p>
-                  </a:txBody>
-                  <a:tcPr/>
-                </a:tc>
-                <a:extLst>
-                  <a:ext uri="{0D108BD9-81ED-4DB2-BD59-A6C34878D82A}">
-                    <a16:rowId xmlns:a16="http://schemas.microsoft.com/office/drawing/2014/main" val="3388985870"/>
-                  </a:ext>
-                </a:extLst>
-              </a:tr>
-            </a:tbl>
-          </a:graphicData>
-        </a:graphic>
-      </p:graphicFrame>
-      <p:cxnSp>
-        <p:nvCxnSpPr>
-          <p:cNvPr id="19" name="Straight Arrow Connector 18">
-            <a:extLst>
-              <a:ext uri="{FF2B5EF4-FFF2-40B4-BE49-F238E27FC236}">
-                <a16:creationId xmlns:a16="http://schemas.microsoft.com/office/drawing/2014/main" id="{B78AA739-B2CB-8CD9-DD7E-597AE1D915EF}"/>
-              </a:ext>
-            </a:extLst>
-          </p:cNvPr>
-          <p:cNvCxnSpPr>
-            <a:cxnSpLocks/>
-          </p:cNvCxnSpPr>
-          <p:nvPr/>
-        </p:nvCxnSpPr>
-        <p:spPr>
-          <a:xfrm flipH="1">
-            <a:off x="6177280" y="4897120"/>
-            <a:ext cx="1361440" cy="0"/>
-          </a:xfrm>
-          <a:prstGeom prst="straightConnector1">
-            <a:avLst/>
-          </a:prstGeom>
-          <a:ln w="28575">
-            <a:solidFill>
-              <a:schemeClr val="tx1"/>
-            </a:solidFill>
-            <a:tailEnd type="triangle"/>
-          </a:ln>
-        </p:spPr>
-        <p:style>
-          <a:lnRef idx="2">
-            <a:schemeClr val="accent1"/>
-          </a:lnRef>
-          <a:fillRef idx="0">
-            <a:schemeClr val="accent1"/>
-          </a:fillRef>
-          <a:effectRef idx="1">
-            <a:schemeClr val="accent1"/>
-          </a:effectRef>
-          <a:fontRef idx="minor">
-            <a:schemeClr val="tx1"/>
-          </a:fontRef>
-        </p:style>
-      </p:cxnSp>
-      <p:cxnSp>
-        <p:nvCxnSpPr>
-          <p:cNvPr id="3" name="Straight Arrow Connector 2">
-            <a:extLst>
-              <a:ext uri="{FF2B5EF4-FFF2-40B4-BE49-F238E27FC236}">
-                <a16:creationId xmlns:a16="http://schemas.microsoft.com/office/drawing/2014/main" id="{B564DAC9-501D-AC3A-A054-46ADFE2EB78D}"/>
-              </a:ext>
-            </a:extLst>
-          </p:cNvPr>
-          <p:cNvCxnSpPr>
-            <a:cxnSpLocks/>
-          </p:cNvCxnSpPr>
-          <p:nvPr/>
-        </p:nvCxnSpPr>
-        <p:spPr>
-          <a:xfrm flipH="1">
-            <a:off x="8778240" y="3083859"/>
-            <a:ext cx="953845" cy="45421"/>
-          </a:xfrm>
-          <a:prstGeom prst="straightConnector1">
-            <a:avLst/>
-          </a:prstGeom>
-          <a:ln w="19050">
-            <a:solidFill>
-              <a:schemeClr val="tx1"/>
-            </a:solidFill>
-            <a:headEnd type="triangle" w="med" len="med"/>
-            <a:tailEnd type="triangle" w="med" len="med"/>
-          </a:ln>
-        </p:spPr>
-        <p:style>
-          <a:lnRef idx="2">
-            <a:schemeClr val="accent1"/>
-          </a:lnRef>
-          <a:fillRef idx="0">
-            <a:schemeClr val="accent1"/>
-          </a:fillRef>
-          <a:effectRef idx="1">
-            <a:schemeClr val="accent1"/>
-          </a:effectRef>
-          <a:fontRef idx="minor">
-            <a:schemeClr val="tx1"/>
-          </a:fontRef>
-        </p:style>
-      </p:cxnSp>
-      <p:sp>
-        <p:nvSpPr>
-          <p:cNvPr id="16" name="TextBox 15">
-            <a:extLst>
-              <a:ext uri="{FF2B5EF4-FFF2-40B4-BE49-F238E27FC236}">
-                <a16:creationId xmlns:a16="http://schemas.microsoft.com/office/drawing/2014/main" id="{ECFB3DB4-83DB-B8F6-68B3-592E3FC6C59C}"/>
-              </a:ext>
-            </a:extLst>
-          </p:cNvPr>
-          <p:cNvSpPr txBox="1"/>
-          <p:nvPr/>
-        </p:nvSpPr>
-        <p:spPr>
-          <a:xfrm>
-            <a:off x="489888" y="3983162"/>
-            <a:ext cx="1660134" cy="369332"/>
-          </a:xfrm>
-          <a:prstGeom prst="rect">
-            <a:avLst/>
-          </a:prstGeom>
-          <a:noFill/>
-        </p:spPr>
-        <p:txBody>
-          <a:bodyPr wrap="none" rtlCol="0">
-            <a:spAutoFit/>
-          </a:bodyPr>
-          <a:lstStyle/>
-          <a:p>
-            <a:r>
-              <a:rPr lang="en-US" dirty="0"/>
-              <a:t>Reconstructed</a:t>
-            </a:r>
-          </a:p>
-        </p:txBody>
-      </p:sp>
-      <p:sp>
-        <p:nvSpPr>
-          <p:cNvPr id="20" name="Arc 19">
-            <a:extLst>
-              <a:ext uri="{FF2B5EF4-FFF2-40B4-BE49-F238E27FC236}">
-                <a16:creationId xmlns:a16="http://schemas.microsoft.com/office/drawing/2014/main" id="{6FF67C21-B99C-E770-DC75-046879E17B96}"/>
-              </a:ext>
-            </a:extLst>
-          </p:cNvPr>
-          <p:cNvSpPr/>
-          <p:nvPr/>
-        </p:nvSpPr>
-        <p:spPr>
-          <a:xfrm rot="2313109">
-            <a:off x="3796750" y="2981739"/>
-            <a:ext cx="1023730" cy="1192695"/>
-          </a:xfrm>
-          <a:prstGeom prst="arc">
-            <a:avLst/>
-          </a:prstGeom>
-          <a:ln>
-            <a:solidFill>
-              <a:schemeClr val="tx1">
-                <a:lumMod val="50000"/>
-                <a:lumOff val="50000"/>
-              </a:schemeClr>
-            </a:solidFill>
-            <a:tailEnd type="triangle"/>
-          </a:ln>
-        </p:spPr>
-        <p:style>
-          <a:lnRef idx="2">
-            <a:schemeClr val="accent1"/>
-          </a:lnRef>
-          <a:fillRef idx="0">
-            <a:schemeClr val="accent1"/>
-          </a:fillRef>
-          <a:effectRef idx="1">
-            <a:schemeClr val="accent1"/>
-          </a:effectRef>
-          <a:fontRef idx="minor">
-            <a:schemeClr val="tx1"/>
-          </a:fontRef>
-        </p:style>
-        <p:txBody>
-          <a:bodyPr rtlCol="0" anchor="ctr"/>
-          <a:lstStyle/>
-          <a:p>
-            <a:pPr algn="ctr"/>
-            <a:endParaRPr lang="en-US">
-              <a:solidFill>
-                <a:schemeClr val="bg2">
-                  <a:lumMod val="50000"/>
-                </a:schemeClr>
-              </a:solidFill>
-            </a:endParaRPr>
-          </a:p>
-        </p:txBody>
-      </p:sp>
-      <p:sp>
-        <p:nvSpPr>
-          <p:cNvPr id="22" name="TextBox 21">
-            <a:extLst>
-              <a:ext uri="{FF2B5EF4-FFF2-40B4-BE49-F238E27FC236}">
-                <a16:creationId xmlns:a16="http://schemas.microsoft.com/office/drawing/2014/main" id="{3104AB98-08B4-33E2-837D-512ED0622472}"/>
-              </a:ext>
-            </a:extLst>
-          </p:cNvPr>
-          <p:cNvSpPr txBox="1"/>
-          <p:nvPr/>
-        </p:nvSpPr>
-        <p:spPr>
-          <a:xfrm>
-            <a:off x="4840356" y="3343725"/>
-            <a:ext cx="2753140" cy="276999"/>
-          </a:xfrm>
-          <a:prstGeom prst="rect">
-            <a:avLst/>
-          </a:prstGeom>
-          <a:noFill/>
-        </p:spPr>
-        <p:txBody>
-          <a:bodyPr wrap="square">
-            <a:spAutoFit/>
-          </a:bodyPr>
-          <a:lstStyle/>
-          <a:p>
-            <a:r>
-              <a:rPr lang="en-GB" sz="1200" dirty="0">
-                <a:solidFill>
-                  <a:schemeClr val="bg2">
-                    <a:lumMod val="50000"/>
-                  </a:schemeClr>
-                </a:solidFill>
-              </a:rPr>
-              <a:t>(steal max in column data values)</a:t>
-            </a:r>
-            <a:endParaRPr lang="en-US" sz="1200" dirty="0">
-              <a:solidFill>
-                <a:schemeClr val="bg2">
-                  <a:lumMod val="50000"/>
-                </a:schemeClr>
-              </a:solidFill>
-            </a:endParaRPr>
-          </a:p>
-        </p:txBody>
-      </p:sp>
-      <p:sp>
-        <p:nvSpPr>
           <p:cNvPr id="5" name="TextBox 4">
             <a:extLst>
               <a:ext uri="{FF2B5EF4-FFF2-40B4-BE49-F238E27FC236}">
@@ -7419,7 +5460,7 @@
 </p:sld>
 </file>
 
-<file path=ppt/slides/slide12.xml><?xml version="1.0" encoding="utf-8"?>
+<file path=ppt/slides/slide11.xml><?xml version="1.0" encoding="utf-8"?>
 <p:sld xmlns:a="http://schemas.openxmlformats.org/drawingml/2006/main" xmlns:r="http://schemas.openxmlformats.org/officeDocument/2006/relationships" xmlns:p="http://schemas.openxmlformats.org/presentationml/2006/main">
   <p:cSld>
     <p:spTree>
@@ -7616,7 +5657,7 @@
 </p:sld>
 </file>
 
-<file path=ppt/slides/slide13.xml><?xml version="1.0" encoding="utf-8"?>
+<file path=ppt/slides/slide12.xml><?xml version="1.0" encoding="utf-8"?>
 <p:sld xmlns:a="http://schemas.openxmlformats.org/drawingml/2006/main" xmlns:r="http://schemas.openxmlformats.org/officeDocument/2006/relationships" xmlns:p="http://schemas.openxmlformats.org/presentationml/2006/main">
   <p:cSld>
     <p:spTree>
@@ -7853,7 +5894,7 @@
 </p:sld>
 </file>
 
-<file path=ppt/slides/slide14.xml><?xml version="1.0" encoding="utf-8"?>
+<file path=ppt/slides/slide13.xml><?xml version="1.0" encoding="utf-8"?>
 <p:sld xmlns:a="http://schemas.openxmlformats.org/drawingml/2006/main" xmlns:r="http://schemas.openxmlformats.org/officeDocument/2006/relationships" xmlns:p="http://schemas.openxmlformats.org/presentationml/2006/main">
   <p:cSld>
     <p:spTree>
@@ -8208,7 +6249,7 @@
 </p:sld>
 </file>
 
-<file path=ppt/slides/slide15.xml><?xml version="1.0" encoding="utf-8"?>
+<file path=ppt/slides/slide14.xml><?xml version="1.0" encoding="utf-8"?>
 <p:sld xmlns:a="http://schemas.openxmlformats.org/drawingml/2006/main" xmlns:r="http://schemas.openxmlformats.org/officeDocument/2006/relationships" xmlns:p="http://schemas.openxmlformats.org/presentationml/2006/main">
   <p:cSld>
     <p:spTree>
@@ -8836,7 +6877,7 @@
 </p:sld>
 </file>
 
-<file path=ppt/slides/slide16.xml><?xml version="1.0" encoding="utf-8"?>
+<file path=ppt/slides/slide15.xml><?xml version="1.0" encoding="utf-8"?>
 <p:sld xmlns:a="http://schemas.openxmlformats.org/drawingml/2006/main" xmlns:r="http://schemas.openxmlformats.org/officeDocument/2006/relationships" xmlns:p="http://schemas.openxmlformats.org/presentationml/2006/main">
   <p:cSld>
     <p:spTree>
@@ -12301,7 +10342,7 @@
 </p:sld>
 </file>
 
-<file path=ppt/slides/slide17.xml><?xml version="1.0" encoding="utf-8"?>
+<file path=ppt/slides/slide16.xml><?xml version="1.0" encoding="utf-8"?>
 <p:sld xmlns:a="http://schemas.openxmlformats.org/drawingml/2006/main" xmlns:r="http://schemas.openxmlformats.org/officeDocument/2006/relationships" xmlns:p="http://schemas.openxmlformats.org/presentationml/2006/main">
   <p:cSld>
     <p:spTree>
@@ -13918,7 +11959,7 @@
 </p:sld>
 </file>
 
-<file path=ppt/slides/slide18.xml><?xml version="1.0" encoding="utf-8"?>
+<file path=ppt/slides/slide17.xml><?xml version="1.0" encoding="utf-8"?>
 <p:sld xmlns:a="http://schemas.openxmlformats.org/drawingml/2006/main" xmlns:r="http://schemas.openxmlformats.org/officeDocument/2006/relationships" xmlns:p="http://schemas.openxmlformats.org/presentationml/2006/main">
   <p:cSld>
     <p:spTree>
@@ -16950,216 +14991,6 @@
           <p:cNvPr id="2" name="Title 1">
             <a:extLst>
               <a:ext uri="{FF2B5EF4-FFF2-40B4-BE49-F238E27FC236}">
-                <a16:creationId xmlns:a16="http://schemas.microsoft.com/office/drawing/2014/main" id="{9C31F916-D901-8AF6-C52F-DEDED89BB5D4}"/>
-              </a:ext>
-            </a:extLst>
-          </p:cNvPr>
-          <p:cNvSpPr>
-            <a:spLocks noGrp="1"/>
-          </p:cNvSpPr>
-          <p:nvPr>
-            <p:ph type="title"/>
-          </p:nvPr>
-        </p:nvSpPr>
-        <p:spPr/>
-        <p:txBody>
-          <a:bodyPr/>
-          <a:lstStyle/>
-          <a:p>
-            <a:r>
-              <a:rPr lang="en-US" dirty="0"/>
-              <a:t>Overview</a:t>
-            </a:r>
-          </a:p>
-        </p:txBody>
-      </p:sp>
-      <p:sp>
-        <p:nvSpPr>
-          <p:cNvPr id="3" name="Content Placeholder 2">
-            <a:extLst>
-              <a:ext uri="{FF2B5EF4-FFF2-40B4-BE49-F238E27FC236}">
-                <a16:creationId xmlns:a16="http://schemas.microsoft.com/office/drawing/2014/main" id="{011FA9C3-968A-0BCC-6E6B-EFAEE932264A}"/>
-              </a:ext>
-            </a:extLst>
-          </p:cNvPr>
-          <p:cNvSpPr>
-            <a:spLocks noGrp="1"/>
-          </p:cNvSpPr>
-          <p:nvPr>
-            <p:ph idx="1"/>
-          </p:nvPr>
-        </p:nvSpPr>
-        <p:spPr>
-          <a:xfrm>
-            <a:off x="838200" y="1395319"/>
-            <a:ext cx="10515600" cy="4973208"/>
-          </a:xfrm>
-        </p:spPr>
-        <p:txBody>
-          <a:bodyPr>
-            <a:normAutofit fontScale="92500" lnSpcReduction="20000"/>
-          </a:bodyPr>
-          <a:lstStyle/>
-          <a:p>
-            <a:r>
-              <a:rPr lang="en-US" dirty="0"/>
-              <a:t>Code for constructing an antigenic map</a:t>
-            </a:r>
-          </a:p>
-          <a:p>
-            <a:pPr lvl="1"/>
-            <a:r>
-              <a:rPr lang="en-US" dirty="0"/>
-              <a:t>Titer data and map distances</a:t>
-            </a:r>
-          </a:p>
-          <a:p>
-            <a:pPr lvl="1"/>
-            <a:r>
-              <a:rPr lang="en-US" dirty="0"/>
-              <a:t>Map optimization</a:t>
-            </a:r>
-          </a:p>
-          <a:p>
-            <a:pPr lvl="1"/>
-            <a:r>
-              <a:rPr lang="en-US" dirty="0"/>
-              <a:t>Map styling</a:t>
-            </a:r>
-          </a:p>
-          <a:p>
-            <a:pPr lvl="1"/>
-            <a:r>
-              <a:rPr lang="en-US" dirty="0"/>
-              <a:t>Map stress</a:t>
-            </a:r>
-          </a:p>
-          <a:p>
-            <a:pPr lvl="1"/>
-            <a:r>
-              <a:rPr lang="en-US" dirty="0"/>
-              <a:t>Positional resolution</a:t>
-            </a:r>
-          </a:p>
-          <a:p>
-            <a:r>
-              <a:rPr lang="en-US" dirty="0"/>
-              <a:t>The interactive </a:t>
-            </a:r>
-            <a:r>
-              <a:rPr lang="en-US" dirty="0" err="1"/>
-              <a:t>Racmacs</a:t>
-            </a:r>
-            <a:r>
-              <a:rPr lang="en-US" dirty="0"/>
-              <a:t> viewer tool</a:t>
-            </a:r>
-          </a:p>
-          <a:p>
-            <a:r>
-              <a:rPr lang="en-US" dirty="0"/>
-              <a:t>Impact of noise on an antigenic map</a:t>
-            </a:r>
-          </a:p>
-          <a:p>
-            <a:pPr lvl="1"/>
-            <a:r>
-              <a:rPr lang="en-US" dirty="0"/>
-              <a:t>Undetectable titers and map positioning</a:t>
-            </a:r>
-          </a:p>
-          <a:p>
-            <a:pPr lvl="1"/>
-            <a:r>
-              <a:rPr lang="en-US" dirty="0"/>
-              <a:t>Comparing maps</a:t>
-            </a:r>
-          </a:p>
-          <a:p>
-            <a:r>
-              <a:rPr lang="en-US" dirty="0"/>
-              <a:t>Simulated SARS-CoV-2 map</a:t>
-            </a:r>
-          </a:p>
-          <a:p>
-            <a:pPr lvl="1"/>
-            <a:r>
-              <a:rPr lang="en-US" dirty="0" err="1"/>
-              <a:t>Colouring</a:t>
-            </a:r>
-            <a:r>
-              <a:rPr lang="en-US" dirty="0"/>
-              <a:t> by sequence</a:t>
-            </a:r>
-          </a:p>
-          <a:p>
-            <a:pPr lvl="1"/>
-            <a:endParaRPr lang="en-US" dirty="0"/>
-          </a:p>
-          <a:p>
-            <a:pPr marL="457200" lvl="1" indent="0">
-              <a:buNone/>
-            </a:pPr>
-            <a:r>
-              <a:rPr lang="en-US" dirty="0"/>
-              <a:t>Link to </a:t>
-            </a:r>
-            <a:r>
-              <a:rPr lang="en-US" dirty="0" err="1"/>
-              <a:t>Racmacs</a:t>
-            </a:r>
-            <a:r>
-              <a:rPr lang="en-US" dirty="0"/>
-              <a:t> package: </a:t>
-            </a:r>
-            <a:r>
-              <a:rPr lang="en-US" dirty="0">
-                <a:hlinkClick r:id="rId2"/>
-              </a:rPr>
-              <a:t>https://acorg.github.io/Racmacs/index.html</a:t>
-            </a:r>
-            <a:r>
-              <a:rPr lang="en-US" dirty="0"/>
-              <a:t> </a:t>
-            </a:r>
-          </a:p>
-        </p:txBody>
-      </p:sp>
-    </p:spTree>
-    <p:extLst>
-      <p:ext uri="{BB962C8B-B14F-4D97-AF65-F5344CB8AC3E}">
-        <p14:creationId xmlns:p14="http://schemas.microsoft.com/office/powerpoint/2010/main" val="660815837"/>
-      </p:ext>
-    </p:extLst>
-  </p:cSld>
-  <p:clrMapOvr>
-    <a:masterClrMapping/>
-  </p:clrMapOvr>
-</p:sld>
-</file>
-
-<file path=ppt/slides/slide3.xml><?xml version="1.0" encoding="utf-8"?>
-<p:sld xmlns:a="http://schemas.openxmlformats.org/drawingml/2006/main" xmlns:r="http://schemas.openxmlformats.org/officeDocument/2006/relationships" xmlns:p="http://schemas.openxmlformats.org/presentationml/2006/main">
-  <p:cSld>
-    <p:spTree>
-      <p:nvGrpSpPr>
-        <p:cNvPr id="1" name=""/>
-        <p:cNvGrpSpPr/>
-        <p:nvPr/>
-      </p:nvGrpSpPr>
-      <p:grpSpPr>
-        <a:xfrm>
-          <a:off x="0" y="0"/>
-          <a:ext cx="0" cy="0"/>
-          <a:chOff x="0" y="0"/>
-          <a:chExt cx="0" cy="0"/>
-        </a:xfrm>
-      </p:grpSpPr>
-      <p:sp>
-        <p:nvSpPr>
-          <p:cNvPr id="2" name="Title 1">
-            <a:extLst>
-              <a:ext uri="{FF2B5EF4-FFF2-40B4-BE49-F238E27FC236}">
                 <a16:creationId xmlns:a16="http://schemas.microsoft.com/office/drawing/2014/main" id="{2AAE06CD-340E-A294-A6C1-F5142DA0FE44}"/>
               </a:ext>
             </a:extLst>
@@ -18099,7 +15930,7 @@
 </p:sld>
 </file>
 
-<file path=ppt/slides/slide4.xml><?xml version="1.0" encoding="utf-8"?>
+<file path=ppt/slides/slide3.xml><?xml version="1.0" encoding="utf-8"?>
 <p:sld xmlns:a="http://schemas.openxmlformats.org/drawingml/2006/main" xmlns:r="http://schemas.openxmlformats.org/officeDocument/2006/relationships" xmlns:p="http://schemas.openxmlformats.org/presentationml/2006/main">
   <p:cSld>
     <p:spTree>
@@ -19841,7 +17672,7 @@
 </p:sld>
 </file>
 
-<file path=ppt/slides/slide5.xml><?xml version="1.0" encoding="utf-8"?>
+<file path=ppt/slides/slide4.xml><?xml version="1.0" encoding="utf-8"?>
 <p:sld xmlns:a="http://schemas.openxmlformats.org/drawingml/2006/main" xmlns:r="http://schemas.openxmlformats.org/officeDocument/2006/relationships" xmlns:p="http://schemas.openxmlformats.org/presentationml/2006/main">
   <p:cSld>
     <p:spTree>
@@ -21684,7 +19515,7 @@
 </p:sld>
 </file>
 
-<file path=ppt/slides/slide6.xml><?xml version="1.0" encoding="utf-8"?>
+<file path=ppt/slides/slide5.xml><?xml version="1.0" encoding="utf-8"?>
 <p:sld xmlns:a="http://schemas.openxmlformats.org/drawingml/2006/main" xmlns:r="http://schemas.openxmlformats.org/officeDocument/2006/relationships" xmlns:p="http://schemas.openxmlformats.org/presentationml/2006/main">
   <p:cSld>
     <p:spTree>
@@ -23324,7 +21155,7 @@
 </p:sld>
 </file>
 
-<file path=ppt/slides/slide7.xml><?xml version="1.0" encoding="utf-8"?>
+<file path=ppt/slides/slide6.xml><?xml version="1.0" encoding="utf-8"?>
 <p:sld xmlns:a="http://schemas.openxmlformats.org/drawingml/2006/main" xmlns:r="http://schemas.openxmlformats.org/officeDocument/2006/relationships" xmlns:p="http://schemas.openxmlformats.org/presentationml/2006/main">
   <p:cSld>
     <p:spTree>
@@ -23569,7 +21400,7 @@
 </p:sld>
 </file>
 
-<file path=ppt/slides/slide8.xml><?xml version="1.0" encoding="utf-8"?>
+<file path=ppt/slides/slide7.xml><?xml version="1.0" encoding="utf-8"?>
 <p:sld xmlns:a="http://schemas.openxmlformats.org/drawingml/2006/main" xmlns:r="http://schemas.openxmlformats.org/officeDocument/2006/relationships" xmlns:p="http://schemas.openxmlformats.org/presentationml/2006/main">
   <p:cSld>
     <p:spTree>
@@ -25419,7 +23250,7 @@
 </p:sld>
 </file>
 
-<file path=ppt/slides/slide9.xml><?xml version="1.0" encoding="utf-8"?>
+<file path=ppt/slides/slide8.xml><?xml version="1.0" encoding="utf-8"?>
 <p:sld xmlns:a="http://schemas.openxmlformats.org/drawingml/2006/main" xmlns:r="http://schemas.openxmlformats.org/officeDocument/2006/relationships" xmlns:p="http://schemas.openxmlformats.org/presentationml/2006/main">
   <p:cSld>
     <p:spTree>
@@ -27282,6 +25113,1969 @@
     <p:extLst>
       <p:ext uri="{BB962C8B-B14F-4D97-AF65-F5344CB8AC3E}">
         <p14:creationId xmlns:p14="http://schemas.microsoft.com/office/powerpoint/2010/main" val="3397885231"/>
+      </p:ext>
+    </p:extLst>
+  </p:cSld>
+  <p:clrMapOvr>
+    <a:masterClrMapping/>
+  </p:clrMapOvr>
+</p:sld>
+</file>
+
+<file path=ppt/slides/slide9.xml><?xml version="1.0" encoding="utf-8"?>
+<p:sld xmlns:a="http://schemas.openxmlformats.org/drawingml/2006/main" xmlns:r="http://schemas.openxmlformats.org/officeDocument/2006/relationships" xmlns:p="http://schemas.openxmlformats.org/presentationml/2006/main">
+  <p:cSld>
+    <p:spTree>
+      <p:nvGrpSpPr>
+        <p:cNvPr id="1" name=""/>
+        <p:cNvGrpSpPr/>
+        <p:nvPr/>
+      </p:nvGrpSpPr>
+      <p:grpSpPr>
+        <a:xfrm>
+          <a:off x="0" y="0"/>
+          <a:ext cx="0" cy="0"/>
+          <a:chOff x="0" y="0"/>
+          <a:chExt cx="0" cy="0"/>
+        </a:xfrm>
+      </p:grpSpPr>
+      <p:sp>
+        <p:nvSpPr>
+          <p:cNvPr id="2" name="Title 1">
+            <a:extLst>
+              <a:ext uri="{FF2B5EF4-FFF2-40B4-BE49-F238E27FC236}">
+                <a16:creationId xmlns:a16="http://schemas.microsoft.com/office/drawing/2014/main" id="{2AAE06CD-340E-A294-A6C1-F5142DA0FE44}"/>
+              </a:ext>
+            </a:extLst>
+          </p:cNvPr>
+          <p:cNvSpPr>
+            <a:spLocks noGrp="1"/>
+          </p:cNvSpPr>
+          <p:nvPr>
+            <p:ph type="title"/>
+          </p:nvPr>
+        </p:nvSpPr>
+        <p:spPr>
+          <a:xfrm>
+            <a:off x="137160" y="161925"/>
+            <a:ext cx="11892280" cy="671195"/>
+          </a:xfrm>
+        </p:spPr>
+        <p:txBody>
+          <a:bodyPr>
+            <a:normAutofit/>
+          </a:bodyPr>
+          <a:lstStyle/>
+          <a:p>
+            <a:r>
+              <a:rPr lang="en-US" sz="3600"/>
+              <a:t>Cross validation error</a:t>
+            </a:r>
+            <a:endParaRPr lang="en-US" sz="3600" i="1" dirty="0"/>
+          </a:p>
+        </p:txBody>
+      </p:sp>
+      <p:graphicFrame>
+        <p:nvGraphicFramePr>
+          <p:cNvPr id="4" name="Table 4">
+            <a:extLst>
+              <a:ext uri="{FF2B5EF4-FFF2-40B4-BE49-F238E27FC236}">
+                <a16:creationId xmlns:a16="http://schemas.microsoft.com/office/drawing/2014/main" id="{D1EEA2CF-55AF-C5FD-AF4A-D403AD31F49A}"/>
+              </a:ext>
+            </a:extLst>
+          </p:cNvPr>
+          <p:cNvGraphicFramePr>
+            <a:graphicFrameLocks noGrp="1"/>
+          </p:cNvGraphicFramePr>
+          <p:nvPr/>
+        </p:nvGraphicFramePr>
+        <p:xfrm>
+          <a:off x="484828" y="1113786"/>
+          <a:ext cx="5468932" cy="1854200"/>
+        </p:xfrm>
+        <a:graphic>
+          <a:graphicData uri="http://schemas.openxmlformats.org/drawingml/2006/table">
+            <a:tbl>
+              <a:tblPr firstRow="1" bandRow="1">
+                <a:tableStyleId>{9D7B26C5-4107-4FEC-AEDC-1716B250A1EF}</a:tableStyleId>
+              </a:tblPr>
+              <a:tblGrid>
+                <a:gridCol w="1800439">
+                  <a:extLst>
+                    <a:ext uri="{9D8B030D-6E8A-4147-A177-3AD203B41FA5}">
+                      <a16:colId xmlns:a16="http://schemas.microsoft.com/office/drawing/2014/main" val="2351268341"/>
+                    </a:ext>
+                  </a:extLst>
+                </a:gridCol>
+                <a:gridCol w="1073349">
+                  <a:extLst>
+                    <a:ext uri="{9D8B030D-6E8A-4147-A177-3AD203B41FA5}">
+                      <a16:colId xmlns:a16="http://schemas.microsoft.com/office/drawing/2014/main" val="3051075737"/>
+                    </a:ext>
+                  </a:extLst>
+                </a:gridCol>
+                <a:gridCol w="1297572">
+                  <a:extLst>
+                    <a:ext uri="{9D8B030D-6E8A-4147-A177-3AD203B41FA5}">
+                      <a16:colId xmlns:a16="http://schemas.microsoft.com/office/drawing/2014/main" val="2719525100"/>
+                    </a:ext>
+                  </a:extLst>
+                </a:gridCol>
+                <a:gridCol w="1297572">
+                  <a:extLst>
+                    <a:ext uri="{9D8B030D-6E8A-4147-A177-3AD203B41FA5}">
+                      <a16:colId xmlns:a16="http://schemas.microsoft.com/office/drawing/2014/main" val="1312788050"/>
+                    </a:ext>
+                  </a:extLst>
+                </a:gridCol>
+              </a:tblGrid>
+              <a:tr h="370840">
+                <a:tc>
+                  <a:txBody>
+                    <a:bodyPr/>
+                    <a:lstStyle/>
+                    <a:p>
+                      <a:endParaRPr lang="en-DE"/>
+                    </a:p>
+                  </a:txBody>
+                  <a:tcPr/>
+                </a:tc>
+                <a:tc>
+                  <a:txBody>
+                    <a:bodyPr/>
+                    <a:lstStyle/>
+                    <a:p>
+                      <a:pPr marL="0" marR="0" lvl="0" indent="0" algn="l" defTabSz="914400" rtl="0" eaLnBrk="1" fontAlgn="auto" latinLnBrk="0" hangingPunct="1">
+                        <a:lnSpc>
+                          <a:spcPct val="100000"/>
+                        </a:lnSpc>
+                        <a:spcBef>
+                          <a:spcPts val="0"/>
+                        </a:spcBef>
+                        <a:spcAft>
+                          <a:spcPts val="0"/>
+                        </a:spcAft>
+                        <a:buClrTx/>
+                        <a:buSzTx/>
+                        <a:buFontTx/>
+                        <a:buNone/>
+                        <a:tabLst/>
+                        <a:defRPr/>
+                      </a:pPr>
+                      <a:r>
+                        <a:rPr lang="en-GB" b="0" dirty="0">
+                          <a:solidFill>
+                            <a:sysClr val="windowText" lastClr="000000"/>
+                          </a:solidFill>
+                        </a:rPr>
+                        <a:t>SR: Wu1</a:t>
+                      </a:r>
+                      <a:endParaRPr lang="en-DE" b="0" dirty="0">
+                        <a:solidFill>
+                          <a:sysClr val="windowText" lastClr="000000"/>
+                        </a:solidFill>
+                      </a:endParaRPr>
+                    </a:p>
+                  </a:txBody>
+                  <a:tcPr/>
+                </a:tc>
+                <a:tc>
+                  <a:txBody>
+                    <a:bodyPr/>
+                    <a:lstStyle/>
+                    <a:p>
+                      <a:pPr marL="0" marR="0" lvl="0" indent="0" algn="l" defTabSz="914400" rtl="0" eaLnBrk="1" fontAlgn="auto" latinLnBrk="0" hangingPunct="1">
+                        <a:lnSpc>
+                          <a:spcPct val="100000"/>
+                        </a:lnSpc>
+                        <a:spcBef>
+                          <a:spcPts val="0"/>
+                        </a:spcBef>
+                        <a:spcAft>
+                          <a:spcPts val="0"/>
+                        </a:spcAft>
+                        <a:buClrTx/>
+                        <a:buSzTx/>
+                        <a:buFontTx/>
+                        <a:buNone/>
+                        <a:tabLst/>
+                        <a:defRPr/>
+                      </a:pPr>
+                      <a:r>
+                        <a:rPr lang="en-GB" b="0" dirty="0">
+                          <a:solidFill>
+                            <a:sysClr val="windowText" lastClr="000000"/>
+                          </a:solidFill>
+                        </a:rPr>
+                        <a:t>SR: BA.1</a:t>
+                      </a:r>
+                      <a:endParaRPr lang="en-DE" b="0">
+                        <a:solidFill>
+                          <a:sysClr val="windowText" lastClr="000000"/>
+                        </a:solidFill>
+                      </a:endParaRPr>
+                    </a:p>
+                  </a:txBody>
+                  <a:tcPr/>
+                </a:tc>
+                <a:tc>
+                  <a:txBody>
+                    <a:bodyPr/>
+                    <a:lstStyle/>
+                    <a:p>
+                      <a:pPr marL="0" marR="0" lvl="0" indent="0" algn="l" defTabSz="914400" rtl="0" eaLnBrk="1" fontAlgn="auto" latinLnBrk="0" hangingPunct="1">
+                        <a:lnSpc>
+                          <a:spcPct val="100000"/>
+                        </a:lnSpc>
+                        <a:spcBef>
+                          <a:spcPts val="0"/>
+                        </a:spcBef>
+                        <a:spcAft>
+                          <a:spcPts val="0"/>
+                        </a:spcAft>
+                        <a:buClrTx/>
+                        <a:buSzTx/>
+                        <a:buFontTx/>
+                        <a:buNone/>
+                        <a:tabLst/>
+                        <a:defRPr/>
+                      </a:pPr>
+                      <a:r>
+                        <a:rPr lang="en-GB" b="0" dirty="0">
+                          <a:solidFill>
+                            <a:sysClr val="windowText" lastClr="000000"/>
+                          </a:solidFill>
+                        </a:rPr>
+                        <a:t>…</a:t>
+                      </a:r>
+                      <a:endParaRPr lang="en-DE" b="0">
+                        <a:solidFill>
+                          <a:sysClr val="windowText" lastClr="000000"/>
+                        </a:solidFill>
+                      </a:endParaRPr>
+                    </a:p>
+                  </a:txBody>
+                  <a:tcPr/>
+                </a:tc>
+                <a:extLst>
+                  <a:ext uri="{0D108BD9-81ED-4DB2-BD59-A6C34878D82A}">
+                    <a16:rowId xmlns:a16="http://schemas.microsoft.com/office/drawing/2014/main" val="3871534099"/>
+                  </a:ext>
+                </a:extLst>
+              </a:tr>
+              <a:tr h="370840">
+                <a:tc>
+                  <a:txBody>
+                    <a:bodyPr/>
+                    <a:lstStyle/>
+                    <a:p>
+                      <a:pPr marL="0" marR="0" lvl="0" indent="0" algn="l" defTabSz="914400" rtl="0" eaLnBrk="1" fontAlgn="auto" latinLnBrk="0" hangingPunct="1">
+                        <a:lnSpc>
+                          <a:spcPct val="100000"/>
+                        </a:lnSpc>
+                        <a:spcBef>
+                          <a:spcPts val="0"/>
+                        </a:spcBef>
+                        <a:spcAft>
+                          <a:spcPts val="0"/>
+                        </a:spcAft>
+                        <a:buClrTx/>
+                        <a:buSzTx/>
+                        <a:buFontTx/>
+                        <a:buNone/>
+                        <a:tabLst/>
+                        <a:defRPr/>
+                      </a:pPr>
+                      <a:r>
+                        <a:rPr lang="en-GB" dirty="0">
+                          <a:solidFill>
+                            <a:schemeClr val="tx2">
+                              <a:lumMod val="75000"/>
+                              <a:lumOff val="25000"/>
+                            </a:schemeClr>
+                          </a:solidFill>
+                        </a:rPr>
+                        <a:t>Wu1</a:t>
+                      </a:r>
+                      <a:endParaRPr lang="en-DE" dirty="0">
+                        <a:solidFill>
+                          <a:schemeClr val="tx2">
+                            <a:lumMod val="75000"/>
+                            <a:lumOff val="25000"/>
+                          </a:schemeClr>
+                        </a:solidFill>
+                      </a:endParaRPr>
+                    </a:p>
+                  </a:txBody>
+                  <a:tcPr>
+                    <a:solidFill>
+                      <a:schemeClr val="bg1">
+                        <a:lumMod val="75000"/>
+                        <a:alpha val="20000"/>
+                      </a:schemeClr>
+                    </a:solidFill>
+                  </a:tcPr>
+                </a:tc>
+                <a:tc>
+                  <a:txBody>
+                    <a:bodyPr/>
+                    <a:lstStyle/>
+                    <a:p>
+                      <a:r>
+                        <a:rPr lang="en-DE" dirty="0"/>
+                        <a:t>160</a:t>
+                      </a:r>
+                    </a:p>
+                  </a:txBody>
+                  <a:tcPr>
+                    <a:solidFill>
+                      <a:schemeClr val="bg1">
+                        <a:lumMod val="75000"/>
+                        <a:alpha val="20000"/>
+                      </a:schemeClr>
+                    </a:solidFill>
+                  </a:tcPr>
+                </a:tc>
+                <a:tc>
+                  <a:txBody>
+                    <a:bodyPr/>
+                    <a:lstStyle/>
+                    <a:p>
+                      <a:pPr marL="0" marR="0" lvl="0" indent="0" algn="l" defTabSz="914400" rtl="0" eaLnBrk="1" fontAlgn="auto" latinLnBrk="0" hangingPunct="1">
+                        <a:lnSpc>
+                          <a:spcPct val="100000"/>
+                        </a:lnSpc>
+                        <a:spcBef>
+                          <a:spcPts val="0"/>
+                        </a:spcBef>
+                        <a:spcAft>
+                          <a:spcPts val="0"/>
+                        </a:spcAft>
+                        <a:buClrTx/>
+                        <a:buSzTx/>
+                        <a:buFontTx/>
+                        <a:buNone/>
+                        <a:tabLst/>
+                        <a:defRPr/>
+                      </a:pPr>
+                      <a:r>
+                        <a:rPr lang="en-DE" dirty="0"/>
+                        <a:t>160</a:t>
+                      </a:r>
+                    </a:p>
+                  </a:txBody>
+                  <a:tcPr>
+                    <a:solidFill>
+                      <a:schemeClr val="bg1">
+                        <a:lumMod val="75000"/>
+                        <a:alpha val="20000"/>
+                      </a:schemeClr>
+                    </a:solidFill>
+                  </a:tcPr>
+                </a:tc>
+                <a:tc>
+                  <a:txBody>
+                    <a:bodyPr/>
+                    <a:lstStyle/>
+                    <a:p>
+                      <a:pPr marL="0" marR="0" lvl="0" indent="0" algn="l" defTabSz="914400" rtl="0" eaLnBrk="1" fontAlgn="auto" latinLnBrk="0" hangingPunct="1">
+                        <a:lnSpc>
+                          <a:spcPct val="100000"/>
+                        </a:lnSpc>
+                        <a:spcBef>
+                          <a:spcPts val="0"/>
+                        </a:spcBef>
+                        <a:spcAft>
+                          <a:spcPts val="0"/>
+                        </a:spcAft>
+                        <a:buClrTx/>
+                        <a:buSzTx/>
+                        <a:buFontTx/>
+                        <a:buNone/>
+                        <a:tabLst/>
+                        <a:defRPr/>
+                      </a:pPr>
+                      <a:r>
+                        <a:rPr lang="en-GB" dirty="0"/>
+                        <a:t>…</a:t>
+                      </a:r>
+                      <a:endParaRPr lang="en-DE" dirty="0"/>
+                    </a:p>
+                  </a:txBody>
+                  <a:tcPr>
+                    <a:solidFill>
+                      <a:schemeClr val="bg1">
+                        <a:lumMod val="75000"/>
+                        <a:alpha val="20000"/>
+                      </a:schemeClr>
+                    </a:solidFill>
+                  </a:tcPr>
+                </a:tc>
+                <a:extLst>
+                  <a:ext uri="{0D108BD9-81ED-4DB2-BD59-A6C34878D82A}">
+                    <a16:rowId xmlns:a16="http://schemas.microsoft.com/office/drawing/2014/main" val="840994641"/>
+                  </a:ext>
+                </a:extLst>
+              </a:tr>
+              <a:tr h="370840">
+                <a:tc>
+                  <a:txBody>
+                    <a:bodyPr/>
+                    <a:lstStyle/>
+                    <a:p>
+                      <a:r>
+                        <a:rPr lang="en-GB" dirty="0">
+                          <a:solidFill>
+                            <a:srgbClr val="7030A0"/>
+                          </a:solidFill>
+                        </a:rPr>
+                        <a:t>BA.2</a:t>
+                      </a:r>
+                      <a:endParaRPr lang="en-DE" dirty="0">
+                        <a:solidFill>
+                          <a:srgbClr val="7030A0"/>
+                        </a:solidFill>
+                      </a:endParaRPr>
+                    </a:p>
+                  </a:txBody>
+                  <a:tcPr/>
+                </a:tc>
+                <a:tc>
+                  <a:txBody>
+                    <a:bodyPr/>
+                    <a:lstStyle/>
+                    <a:p>
+                      <a:r>
+                        <a:rPr lang="en-DE"/>
+                        <a:t>40</a:t>
+                      </a:r>
+                      <a:endParaRPr lang="en-DE" dirty="0"/>
+                    </a:p>
+                  </a:txBody>
+                  <a:tcPr/>
+                </a:tc>
+                <a:tc>
+                  <a:txBody>
+                    <a:bodyPr/>
+                    <a:lstStyle/>
+                    <a:p>
+                      <a:pPr marL="0" marR="0" lvl="0" indent="0" algn="l" defTabSz="914400" rtl="0" eaLnBrk="1" fontAlgn="auto" latinLnBrk="0" hangingPunct="1">
+                        <a:lnSpc>
+                          <a:spcPct val="100000"/>
+                        </a:lnSpc>
+                        <a:spcBef>
+                          <a:spcPts val="0"/>
+                        </a:spcBef>
+                        <a:spcAft>
+                          <a:spcPts val="0"/>
+                        </a:spcAft>
+                        <a:buClrTx/>
+                        <a:buSzTx/>
+                        <a:buFontTx/>
+                        <a:buNone/>
+                        <a:tabLst/>
+                        <a:defRPr/>
+                      </a:pPr>
+                      <a:r>
+                        <a:rPr lang="en-GB" dirty="0">
+                          <a:solidFill>
+                            <a:srgbClr val="FF0000"/>
+                          </a:solidFill>
+                        </a:rPr>
+                        <a:t>X</a:t>
+                      </a:r>
+                      <a:endParaRPr lang="en-DE" dirty="0">
+                        <a:solidFill>
+                          <a:srgbClr val="FF0000"/>
+                        </a:solidFill>
+                      </a:endParaRPr>
+                    </a:p>
+                  </a:txBody>
+                  <a:tcPr/>
+                </a:tc>
+                <a:tc>
+                  <a:txBody>
+                    <a:bodyPr/>
+                    <a:lstStyle/>
+                    <a:p>
+                      <a:pPr marL="0" marR="0" lvl="0" indent="0" algn="l" defTabSz="914400" rtl="0" eaLnBrk="1" fontAlgn="auto" latinLnBrk="0" hangingPunct="1">
+                        <a:lnSpc>
+                          <a:spcPct val="100000"/>
+                        </a:lnSpc>
+                        <a:spcBef>
+                          <a:spcPts val="0"/>
+                        </a:spcBef>
+                        <a:spcAft>
+                          <a:spcPts val="0"/>
+                        </a:spcAft>
+                        <a:buClrTx/>
+                        <a:buSzTx/>
+                        <a:buFontTx/>
+                        <a:buNone/>
+                        <a:tabLst/>
+                        <a:defRPr/>
+                      </a:pPr>
+                      <a:r>
+                        <a:rPr lang="en-GB" dirty="0"/>
+                        <a:t>…</a:t>
+                      </a:r>
+                      <a:endParaRPr lang="en-DE" dirty="0"/>
+                    </a:p>
+                  </a:txBody>
+                  <a:tcPr/>
+                </a:tc>
+                <a:extLst>
+                  <a:ext uri="{0D108BD9-81ED-4DB2-BD59-A6C34878D82A}">
+                    <a16:rowId xmlns:a16="http://schemas.microsoft.com/office/drawing/2014/main" val="2051936593"/>
+                  </a:ext>
+                </a:extLst>
+              </a:tr>
+              <a:tr h="370840">
+                <a:tc>
+                  <a:txBody>
+                    <a:bodyPr/>
+                    <a:lstStyle/>
+                    <a:p>
+                      <a:r>
+                        <a:rPr lang="en-GB" dirty="0">
+                          <a:solidFill>
+                            <a:srgbClr val="EA4D83"/>
+                          </a:solidFill>
+                        </a:rPr>
+                        <a:t>BA.5</a:t>
+                      </a:r>
+                      <a:endParaRPr lang="en-DE" dirty="0">
+                        <a:solidFill>
+                          <a:srgbClr val="EA4D83"/>
+                        </a:solidFill>
+                      </a:endParaRPr>
+                    </a:p>
+                  </a:txBody>
+                  <a:tcPr>
+                    <a:solidFill>
+                      <a:schemeClr val="bg1">
+                        <a:lumMod val="75000"/>
+                        <a:alpha val="20000"/>
+                      </a:schemeClr>
+                    </a:solidFill>
+                  </a:tcPr>
+                </a:tc>
+                <a:tc>
+                  <a:txBody>
+                    <a:bodyPr/>
+                    <a:lstStyle/>
+                    <a:p>
+                      <a:r>
+                        <a:rPr lang="en-DE" dirty="0"/>
+                        <a:t>80</a:t>
+                      </a:r>
+                    </a:p>
+                  </a:txBody>
+                  <a:tcPr>
+                    <a:solidFill>
+                      <a:schemeClr val="bg1">
+                        <a:lumMod val="75000"/>
+                        <a:alpha val="20000"/>
+                      </a:schemeClr>
+                    </a:solidFill>
+                  </a:tcPr>
+                </a:tc>
+                <a:tc>
+                  <a:txBody>
+                    <a:bodyPr/>
+                    <a:lstStyle/>
+                    <a:p>
+                      <a:r>
+                        <a:rPr lang="en-DE" dirty="0"/>
+                        <a:t>320</a:t>
+                      </a:r>
+                    </a:p>
+                  </a:txBody>
+                  <a:tcPr>
+                    <a:solidFill>
+                      <a:schemeClr val="bg1">
+                        <a:lumMod val="75000"/>
+                        <a:alpha val="20000"/>
+                      </a:schemeClr>
+                    </a:solidFill>
+                  </a:tcPr>
+                </a:tc>
+                <a:tc>
+                  <a:txBody>
+                    <a:bodyPr/>
+                    <a:lstStyle/>
+                    <a:p>
+                      <a:r>
+                        <a:rPr lang="en-GB" dirty="0"/>
+                        <a:t>…</a:t>
+                      </a:r>
+                      <a:endParaRPr lang="en-DE" dirty="0"/>
+                    </a:p>
+                  </a:txBody>
+                  <a:tcPr>
+                    <a:solidFill>
+                      <a:schemeClr val="bg1">
+                        <a:lumMod val="75000"/>
+                        <a:alpha val="20000"/>
+                      </a:schemeClr>
+                    </a:solidFill>
+                  </a:tcPr>
+                </a:tc>
+                <a:extLst>
+                  <a:ext uri="{0D108BD9-81ED-4DB2-BD59-A6C34878D82A}">
+                    <a16:rowId xmlns:a16="http://schemas.microsoft.com/office/drawing/2014/main" val="1541770388"/>
+                  </a:ext>
+                </a:extLst>
+              </a:tr>
+              <a:tr h="370840">
+                <a:tc>
+                  <a:txBody>
+                    <a:bodyPr/>
+                    <a:lstStyle/>
+                    <a:p>
+                      <a:r>
+                        <a:rPr lang="en-GB" dirty="0">
+                          <a:solidFill>
+                            <a:srgbClr val="7030A0"/>
+                          </a:solidFill>
+                        </a:rPr>
+                        <a:t>…</a:t>
+                      </a:r>
+                      <a:endParaRPr lang="en-DE" dirty="0">
+                        <a:solidFill>
+                          <a:srgbClr val="7030A0"/>
+                        </a:solidFill>
+                      </a:endParaRPr>
+                    </a:p>
+                  </a:txBody>
+                  <a:tcPr/>
+                </a:tc>
+                <a:tc>
+                  <a:txBody>
+                    <a:bodyPr/>
+                    <a:lstStyle/>
+                    <a:p>
+                      <a:r>
+                        <a:rPr lang="en-GB" dirty="0"/>
+                        <a:t>…</a:t>
+                      </a:r>
+                      <a:endParaRPr lang="en-DE" dirty="0"/>
+                    </a:p>
+                  </a:txBody>
+                  <a:tcPr/>
+                </a:tc>
+                <a:tc>
+                  <a:txBody>
+                    <a:bodyPr/>
+                    <a:lstStyle/>
+                    <a:p>
+                      <a:pPr marL="0" marR="0" lvl="0" indent="0" algn="l" defTabSz="914400" rtl="0" eaLnBrk="1" fontAlgn="auto" latinLnBrk="0" hangingPunct="1">
+                        <a:lnSpc>
+                          <a:spcPct val="100000"/>
+                        </a:lnSpc>
+                        <a:spcBef>
+                          <a:spcPts val="0"/>
+                        </a:spcBef>
+                        <a:spcAft>
+                          <a:spcPts val="0"/>
+                        </a:spcAft>
+                        <a:buClrTx/>
+                        <a:buSzTx/>
+                        <a:buFontTx/>
+                        <a:buNone/>
+                        <a:tabLst/>
+                        <a:defRPr/>
+                      </a:pPr>
+                      <a:r>
+                        <a:rPr lang="en-GB" dirty="0"/>
+                        <a:t>…</a:t>
+                      </a:r>
+                      <a:endParaRPr lang="en-DE" dirty="0"/>
+                    </a:p>
+                  </a:txBody>
+                  <a:tcPr/>
+                </a:tc>
+                <a:tc>
+                  <a:txBody>
+                    <a:bodyPr/>
+                    <a:lstStyle/>
+                    <a:p>
+                      <a:pPr marL="0" marR="0" lvl="0" indent="0" algn="l" defTabSz="914400" rtl="0" eaLnBrk="1" fontAlgn="auto" latinLnBrk="0" hangingPunct="1">
+                        <a:lnSpc>
+                          <a:spcPct val="100000"/>
+                        </a:lnSpc>
+                        <a:spcBef>
+                          <a:spcPts val="0"/>
+                        </a:spcBef>
+                        <a:spcAft>
+                          <a:spcPts val="0"/>
+                        </a:spcAft>
+                        <a:buClrTx/>
+                        <a:buSzTx/>
+                        <a:buFontTx/>
+                        <a:buNone/>
+                        <a:tabLst/>
+                        <a:defRPr/>
+                      </a:pPr>
+                      <a:endParaRPr lang="en-DE" dirty="0"/>
+                    </a:p>
+                  </a:txBody>
+                  <a:tcPr/>
+                </a:tc>
+                <a:extLst>
+                  <a:ext uri="{0D108BD9-81ED-4DB2-BD59-A6C34878D82A}">
+                    <a16:rowId xmlns:a16="http://schemas.microsoft.com/office/drawing/2014/main" val="3388985870"/>
+                  </a:ext>
+                </a:extLst>
+              </a:tr>
+            </a:tbl>
+          </a:graphicData>
+        </a:graphic>
+      </p:graphicFrame>
+      <p:pic>
+        <p:nvPicPr>
+          <p:cNvPr id="6" name="Picture 5" descr="A grid with dots and squares&#10;&#10;Description automatically generated">
+            <a:extLst>
+              <a:ext uri="{FF2B5EF4-FFF2-40B4-BE49-F238E27FC236}">
+                <a16:creationId xmlns:a16="http://schemas.microsoft.com/office/drawing/2014/main" id="{8890A10E-F16C-3A92-E30B-58BEF840CB93}"/>
+              </a:ext>
+            </a:extLst>
+          </p:cNvPr>
+          <p:cNvPicPr>
+            <a:picLocks noChangeAspect="1"/>
+          </p:cNvPicPr>
+          <p:nvPr/>
+        </p:nvPicPr>
+        <p:blipFill>
+          <a:blip r:embed="rId2"/>
+          <a:stretch>
+            <a:fillRect/>
+          </a:stretch>
+        </p:blipFill>
+        <p:spPr>
+          <a:xfrm>
+            <a:off x="7635423" y="792480"/>
+            <a:ext cx="4353989" cy="5425440"/>
+          </a:xfrm>
+          <a:prstGeom prst="rect">
+            <a:avLst/>
+          </a:prstGeom>
+        </p:spPr>
+      </p:pic>
+      <p:cxnSp>
+        <p:nvCxnSpPr>
+          <p:cNvPr id="8" name="Straight Arrow Connector 7">
+            <a:extLst>
+              <a:ext uri="{FF2B5EF4-FFF2-40B4-BE49-F238E27FC236}">
+                <a16:creationId xmlns:a16="http://schemas.microsoft.com/office/drawing/2014/main" id="{4DA0EFDC-E869-266C-F95D-587878E645E7}"/>
+              </a:ext>
+            </a:extLst>
+          </p:cNvPr>
+          <p:cNvCxnSpPr/>
+          <p:nvPr/>
+        </p:nvCxnSpPr>
+        <p:spPr>
+          <a:xfrm>
+            <a:off x="6146800" y="2082800"/>
+            <a:ext cx="1351280" cy="0"/>
+          </a:xfrm>
+          <a:prstGeom prst="straightConnector1">
+            <a:avLst/>
+          </a:prstGeom>
+          <a:ln w="28575">
+            <a:solidFill>
+              <a:schemeClr val="tx1"/>
+            </a:solidFill>
+            <a:tailEnd type="triangle"/>
+          </a:ln>
+        </p:spPr>
+        <p:style>
+          <a:lnRef idx="2">
+            <a:schemeClr val="accent1"/>
+          </a:lnRef>
+          <a:fillRef idx="0">
+            <a:schemeClr val="accent1"/>
+          </a:fillRef>
+          <a:effectRef idx="1">
+            <a:schemeClr val="accent1"/>
+          </a:effectRef>
+          <a:fontRef idx="minor">
+            <a:schemeClr val="tx1"/>
+          </a:fontRef>
+        </p:style>
+      </p:cxnSp>
+      <p:sp>
+        <p:nvSpPr>
+          <p:cNvPr id="10" name="TextBox 9">
+            <a:extLst>
+              <a:ext uri="{FF2B5EF4-FFF2-40B4-BE49-F238E27FC236}">
+                <a16:creationId xmlns:a16="http://schemas.microsoft.com/office/drawing/2014/main" id="{383602A5-8753-2DDC-BC69-BD225545C5D2}"/>
+              </a:ext>
+            </a:extLst>
+          </p:cNvPr>
+          <p:cNvSpPr txBox="1"/>
+          <p:nvPr/>
+        </p:nvSpPr>
+        <p:spPr>
+          <a:xfrm>
+            <a:off x="8092440" y="2827774"/>
+            <a:ext cx="695960" cy="369332"/>
+          </a:xfrm>
+          <a:prstGeom prst="rect">
+            <a:avLst/>
+          </a:prstGeom>
+          <a:noFill/>
+        </p:spPr>
+        <p:txBody>
+          <a:bodyPr wrap="square">
+            <a:spAutoFit/>
+          </a:bodyPr>
+          <a:lstStyle/>
+          <a:p>
+            <a:r>
+              <a:rPr lang="en-GB" dirty="0">
+                <a:solidFill>
+                  <a:schemeClr val="tx2">
+                    <a:lumMod val="75000"/>
+                    <a:lumOff val="25000"/>
+                  </a:schemeClr>
+                </a:solidFill>
+              </a:rPr>
+              <a:t>Wu1</a:t>
+            </a:r>
+            <a:endParaRPr lang="en-US" dirty="0">
+              <a:solidFill>
+                <a:schemeClr val="tx2">
+                  <a:lumMod val="75000"/>
+                  <a:lumOff val="25000"/>
+                </a:schemeClr>
+              </a:solidFill>
+            </a:endParaRPr>
+          </a:p>
+        </p:txBody>
+      </p:sp>
+      <p:sp>
+        <p:nvSpPr>
+          <p:cNvPr id="12" name="TextBox 11">
+            <a:extLst>
+              <a:ext uri="{FF2B5EF4-FFF2-40B4-BE49-F238E27FC236}">
+                <a16:creationId xmlns:a16="http://schemas.microsoft.com/office/drawing/2014/main" id="{49463118-A6B8-5B09-D8B0-180E12D87857}"/>
+              </a:ext>
+            </a:extLst>
+          </p:cNvPr>
+          <p:cNvSpPr txBox="1"/>
+          <p:nvPr/>
+        </p:nvSpPr>
+        <p:spPr>
+          <a:xfrm>
+            <a:off x="9044940" y="3691374"/>
+            <a:ext cx="657860" cy="369332"/>
+          </a:xfrm>
+          <a:prstGeom prst="rect">
+            <a:avLst/>
+          </a:prstGeom>
+          <a:noFill/>
+        </p:spPr>
+        <p:txBody>
+          <a:bodyPr wrap="square">
+            <a:spAutoFit/>
+          </a:bodyPr>
+          <a:lstStyle/>
+          <a:p>
+            <a:r>
+              <a:rPr lang="en-GB" dirty="0">
+                <a:solidFill>
+                  <a:srgbClr val="7030A0"/>
+                </a:solidFill>
+              </a:rPr>
+              <a:t>BA.2</a:t>
+            </a:r>
+            <a:endParaRPr lang="en-US" dirty="0"/>
+          </a:p>
+        </p:txBody>
+      </p:sp>
+      <p:sp>
+        <p:nvSpPr>
+          <p:cNvPr id="14" name="TextBox 13">
+            <a:extLst>
+              <a:ext uri="{FF2B5EF4-FFF2-40B4-BE49-F238E27FC236}">
+                <a16:creationId xmlns:a16="http://schemas.microsoft.com/office/drawing/2014/main" id="{E9ED2004-6ADD-B056-F6DB-830EF0BD82A4}"/>
+              </a:ext>
+            </a:extLst>
+          </p:cNvPr>
+          <p:cNvSpPr txBox="1"/>
+          <p:nvPr/>
+        </p:nvSpPr>
+        <p:spPr>
+          <a:xfrm>
+            <a:off x="9278620" y="3088640"/>
+            <a:ext cx="718820" cy="369332"/>
+          </a:xfrm>
+          <a:prstGeom prst="rect">
+            <a:avLst/>
+          </a:prstGeom>
+          <a:noFill/>
+        </p:spPr>
+        <p:txBody>
+          <a:bodyPr wrap="square">
+            <a:spAutoFit/>
+          </a:bodyPr>
+          <a:lstStyle/>
+          <a:p>
+            <a:r>
+              <a:rPr lang="en-GB" dirty="0">
+                <a:solidFill>
+                  <a:srgbClr val="EA4D83"/>
+                </a:solidFill>
+              </a:rPr>
+              <a:t>BA.5</a:t>
+            </a:r>
+            <a:endParaRPr lang="en-DE" dirty="0">
+              <a:solidFill>
+                <a:srgbClr val="EA4D83"/>
+              </a:solidFill>
+            </a:endParaRPr>
+          </a:p>
+        </p:txBody>
+      </p:sp>
+      <p:sp>
+        <p:nvSpPr>
+          <p:cNvPr id="15" name="TextBox 14">
+            <a:extLst>
+              <a:ext uri="{FF2B5EF4-FFF2-40B4-BE49-F238E27FC236}">
+                <a16:creationId xmlns:a16="http://schemas.microsoft.com/office/drawing/2014/main" id="{E732C92F-5A68-3A5A-CD4A-B0C235AF62E3}"/>
+              </a:ext>
+            </a:extLst>
+          </p:cNvPr>
+          <p:cNvSpPr txBox="1"/>
+          <p:nvPr/>
+        </p:nvSpPr>
+        <p:spPr>
+          <a:xfrm>
+            <a:off x="436880" y="1107440"/>
+            <a:ext cx="1178592" cy="369332"/>
+          </a:xfrm>
+          <a:prstGeom prst="rect">
+            <a:avLst/>
+          </a:prstGeom>
+          <a:noFill/>
+        </p:spPr>
+        <p:txBody>
+          <a:bodyPr wrap="none" rtlCol="0">
+            <a:spAutoFit/>
+          </a:bodyPr>
+          <a:lstStyle/>
+          <a:p>
+            <a:r>
+              <a:rPr lang="en-US" dirty="0"/>
+              <a:t>Measured</a:t>
+            </a:r>
+          </a:p>
+        </p:txBody>
+      </p:sp>
+      <p:graphicFrame>
+        <p:nvGraphicFramePr>
+          <p:cNvPr id="18" name="Table 4">
+            <a:extLst>
+              <a:ext uri="{FF2B5EF4-FFF2-40B4-BE49-F238E27FC236}">
+                <a16:creationId xmlns:a16="http://schemas.microsoft.com/office/drawing/2014/main" id="{E63632B7-A105-D8E8-88E8-8547641B6635}"/>
+              </a:ext>
+            </a:extLst>
+          </p:cNvPr>
+          <p:cNvGraphicFramePr>
+            <a:graphicFrameLocks noGrp="1"/>
+          </p:cNvGraphicFramePr>
+          <p:nvPr/>
+        </p:nvGraphicFramePr>
+        <p:xfrm>
+          <a:off x="566108" y="3978906"/>
+          <a:ext cx="5468932" cy="1854200"/>
+        </p:xfrm>
+        <a:graphic>
+          <a:graphicData uri="http://schemas.openxmlformats.org/drawingml/2006/table">
+            <a:tbl>
+              <a:tblPr firstRow="1" bandRow="1">
+                <a:tableStyleId>{9D7B26C5-4107-4FEC-AEDC-1716B250A1EF}</a:tableStyleId>
+              </a:tblPr>
+              <a:tblGrid>
+                <a:gridCol w="1800439">
+                  <a:extLst>
+                    <a:ext uri="{9D8B030D-6E8A-4147-A177-3AD203B41FA5}">
+                      <a16:colId xmlns:a16="http://schemas.microsoft.com/office/drawing/2014/main" val="2351268341"/>
+                    </a:ext>
+                  </a:extLst>
+                </a:gridCol>
+                <a:gridCol w="1073349">
+                  <a:extLst>
+                    <a:ext uri="{9D8B030D-6E8A-4147-A177-3AD203B41FA5}">
+                      <a16:colId xmlns:a16="http://schemas.microsoft.com/office/drawing/2014/main" val="3051075737"/>
+                    </a:ext>
+                  </a:extLst>
+                </a:gridCol>
+                <a:gridCol w="1297572">
+                  <a:extLst>
+                    <a:ext uri="{9D8B030D-6E8A-4147-A177-3AD203B41FA5}">
+                      <a16:colId xmlns:a16="http://schemas.microsoft.com/office/drawing/2014/main" val="2719525100"/>
+                    </a:ext>
+                  </a:extLst>
+                </a:gridCol>
+                <a:gridCol w="1297572">
+                  <a:extLst>
+                    <a:ext uri="{9D8B030D-6E8A-4147-A177-3AD203B41FA5}">
+                      <a16:colId xmlns:a16="http://schemas.microsoft.com/office/drawing/2014/main" val="1312788050"/>
+                    </a:ext>
+                  </a:extLst>
+                </a:gridCol>
+              </a:tblGrid>
+              <a:tr h="370840">
+                <a:tc>
+                  <a:txBody>
+                    <a:bodyPr/>
+                    <a:lstStyle/>
+                    <a:p>
+                      <a:endParaRPr lang="en-DE"/>
+                    </a:p>
+                  </a:txBody>
+                  <a:tcPr/>
+                </a:tc>
+                <a:tc>
+                  <a:txBody>
+                    <a:bodyPr/>
+                    <a:lstStyle/>
+                    <a:p>
+                      <a:pPr marL="0" marR="0" lvl="0" indent="0" algn="l" defTabSz="914400" rtl="0" eaLnBrk="1" fontAlgn="auto" latinLnBrk="0" hangingPunct="1">
+                        <a:lnSpc>
+                          <a:spcPct val="100000"/>
+                        </a:lnSpc>
+                        <a:spcBef>
+                          <a:spcPts val="0"/>
+                        </a:spcBef>
+                        <a:spcAft>
+                          <a:spcPts val="0"/>
+                        </a:spcAft>
+                        <a:buClrTx/>
+                        <a:buSzTx/>
+                        <a:buFontTx/>
+                        <a:buNone/>
+                        <a:tabLst/>
+                        <a:defRPr/>
+                      </a:pPr>
+                      <a:r>
+                        <a:rPr lang="en-GB" b="0" dirty="0">
+                          <a:solidFill>
+                            <a:sysClr val="windowText" lastClr="000000"/>
+                          </a:solidFill>
+                        </a:rPr>
+                        <a:t>SR: Wu1</a:t>
+                      </a:r>
+                      <a:endParaRPr lang="en-DE" b="0" dirty="0">
+                        <a:solidFill>
+                          <a:sysClr val="windowText" lastClr="000000"/>
+                        </a:solidFill>
+                      </a:endParaRPr>
+                    </a:p>
+                  </a:txBody>
+                  <a:tcPr/>
+                </a:tc>
+                <a:tc>
+                  <a:txBody>
+                    <a:bodyPr/>
+                    <a:lstStyle/>
+                    <a:p>
+                      <a:pPr marL="0" marR="0" lvl="0" indent="0" algn="l" defTabSz="914400" rtl="0" eaLnBrk="1" fontAlgn="auto" latinLnBrk="0" hangingPunct="1">
+                        <a:lnSpc>
+                          <a:spcPct val="100000"/>
+                        </a:lnSpc>
+                        <a:spcBef>
+                          <a:spcPts val="0"/>
+                        </a:spcBef>
+                        <a:spcAft>
+                          <a:spcPts val="0"/>
+                        </a:spcAft>
+                        <a:buClrTx/>
+                        <a:buSzTx/>
+                        <a:buFontTx/>
+                        <a:buNone/>
+                        <a:tabLst/>
+                        <a:defRPr/>
+                      </a:pPr>
+                      <a:r>
+                        <a:rPr lang="en-GB" b="0" dirty="0">
+                          <a:solidFill>
+                            <a:sysClr val="windowText" lastClr="000000"/>
+                          </a:solidFill>
+                        </a:rPr>
+                        <a:t>SR: BA.1</a:t>
+                      </a:r>
+                      <a:endParaRPr lang="en-DE" b="0">
+                        <a:solidFill>
+                          <a:sysClr val="windowText" lastClr="000000"/>
+                        </a:solidFill>
+                      </a:endParaRPr>
+                    </a:p>
+                  </a:txBody>
+                  <a:tcPr/>
+                </a:tc>
+                <a:tc>
+                  <a:txBody>
+                    <a:bodyPr/>
+                    <a:lstStyle/>
+                    <a:p>
+                      <a:pPr marL="0" marR="0" lvl="0" indent="0" algn="l" defTabSz="914400" rtl="0" eaLnBrk="1" fontAlgn="auto" latinLnBrk="0" hangingPunct="1">
+                        <a:lnSpc>
+                          <a:spcPct val="100000"/>
+                        </a:lnSpc>
+                        <a:spcBef>
+                          <a:spcPts val="0"/>
+                        </a:spcBef>
+                        <a:spcAft>
+                          <a:spcPts val="0"/>
+                        </a:spcAft>
+                        <a:buClrTx/>
+                        <a:buSzTx/>
+                        <a:buFontTx/>
+                        <a:buNone/>
+                        <a:tabLst/>
+                        <a:defRPr/>
+                      </a:pPr>
+                      <a:r>
+                        <a:rPr lang="en-GB" b="0" dirty="0">
+                          <a:solidFill>
+                            <a:sysClr val="windowText" lastClr="000000"/>
+                          </a:solidFill>
+                        </a:rPr>
+                        <a:t>…</a:t>
+                      </a:r>
+                      <a:endParaRPr lang="en-DE" b="0">
+                        <a:solidFill>
+                          <a:sysClr val="windowText" lastClr="000000"/>
+                        </a:solidFill>
+                      </a:endParaRPr>
+                    </a:p>
+                  </a:txBody>
+                  <a:tcPr/>
+                </a:tc>
+                <a:extLst>
+                  <a:ext uri="{0D108BD9-81ED-4DB2-BD59-A6C34878D82A}">
+                    <a16:rowId xmlns:a16="http://schemas.microsoft.com/office/drawing/2014/main" val="3871534099"/>
+                  </a:ext>
+                </a:extLst>
+              </a:tr>
+              <a:tr h="370840">
+                <a:tc>
+                  <a:txBody>
+                    <a:bodyPr/>
+                    <a:lstStyle/>
+                    <a:p>
+                      <a:pPr marL="0" marR="0" lvl="0" indent="0" algn="l" defTabSz="914400" rtl="0" eaLnBrk="1" fontAlgn="auto" latinLnBrk="0" hangingPunct="1">
+                        <a:lnSpc>
+                          <a:spcPct val="100000"/>
+                        </a:lnSpc>
+                        <a:spcBef>
+                          <a:spcPts val="0"/>
+                        </a:spcBef>
+                        <a:spcAft>
+                          <a:spcPts val="0"/>
+                        </a:spcAft>
+                        <a:buClrTx/>
+                        <a:buSzTx/>
+                        <a:buFontTx/>
+                        <a:buNone/>
+                        <a:tabLst/>
+                        <a:defRPr/>
+                      </a:pPr>
+                      <a:r>
+                        <a:rPr lang="en-GB" dirty="0">
+                          <a:solidFill>
+                            <a:schemeClr val="tx2">
+                              <a:lumMod val="75000"/>
+                              <a:lumOff val="25000"/>
+                            </a:schemeClr>
+                          </a:solidFill>
+                        </a:rPr>
+                        <a:t>Wu1</a:t>
+                      </a:r>
+                      <a:endParaRPr lang="en-DE" dirty="0">
+                        <a:solidFill>
+                          <a:schemeClr val="tx2">
+                            <a:lumMod val="75000"/>
+                            <a:lumOff val="25000"/>
+                          </a:schemeClr>
+                        </a:solidFill>
+                      </a:endParaRPr>
+                    </a:p>
+                  </a:txBody>
+                  <a:tcPr>
+                    <a:solidFill>
+                      <a:schemeClr val="bg1">
+                        <a:lumMod val="75000"/>
+                        <a:alpha val="20000"/>
+                      </a:schemeClr>
+                    </a:solidFill>
+                  </a:tcPr>
+                </a:tc>
+                <a:tc>
+                  <a:txBody>
+                    <a:bodyPr/>
+                    <a:lstStyle/>
+                    <a:p>
+                      <a:r>
+                        <a:rPr lang="en-DE"/>
+                        <a:t>1</a:t>
+                      </a:r>
+                      <a:r>
+                        <a:rPr lang="en-GB" dirty="0"/>
+                        <a:t>58</a:t>
+                      </a:r>
+                      <a:endParaRPr lang="en-DE" dirty="0"/>
+                    </a:p>
+                  </a:txBody>
+                  <a:tcPr>
+                    <a:solidFill>
+                      <a:schemeClr val="bg1">
+                        <a:lumMod val="75000"/>
+                        <a:alpha val="20000"/>
+                      </a:schemeClr>
+                    </a:solidFill>
+                  </a:tcPr>
+                </a:tc>
+                <a:tc>
+                  <a:txBody>
+                    <a:bodyPr/>
+                    <a:lstStyle/>
+                    <a:p>
+                      <a:pPr marL="0" marR="0" lvl="0" indent="0" algn="l" defTabSz="914400" rtl="0" eaLnBrk="1" fontAlgn="auto" latinLnBrk="0" hangingPunct="1">
+                        <a:lnSpc>
+                          <a:spcPct val="100000"/>
+                        </a:lnSpc>
+                        <a:spcBef>
+                          <a:spcPts val="0"/>
+                        </a:spcBef>
+                        <a:spcAft>
+                          <a:spcPts val="0"/>
+                        </a:spcAft>
+                        <a:buClrTx/>
+                        <a:buSzTx/>
+                        <a:buFontTx/>
+                        <a:buNone/>
+                        <a:tabLst/>
+                        <a:defRPr/>
+                      </a:pPr>
+                      <a:r>
+                        <a:rPr lang="en-GB" dirty="0"/>
+                        <a:t>134</a:t>
+                      </a:r>
+                      <a:endParaRPr lang="en-DE" dirty="0"/>
+                    </a:p>
+                  </a:txBody>
+                  <a:tcPr>
+                    <a:solidFill>
+                      <a:schemeClr val="bg1">
+                        <a:lumMod val="75000"/>
+                        <a:alpha val="20000"/>
+                      </a:schemeClr>
+                    </a:solidFill>
+                  </a:tcPr>
+                </a:tc>
+                <a:tc>
+                  <a:txBody>
+                    <a:bodyPr/>
+                    <a:lstStyle/>
+                    <a:p>
+                      <a:pPr marL="0" marR="0" lvl="0" indent="0" algn="l" defTabSz="914400" rtl="0" eaLnBrk="1" fontAlgn="auto" latinLnBrk="0" hangingPunct="1">
+                        <a:lnSpc>
+                          <a:spcPct val="100000"/>
+                        </a:lnSpc>
+                        <a:spcBef>
+                          <a:spcPts val="0"/>
+                        </a:spcBef>
+                        <a:spcAft>
+                          <a:spcPts val="0"/>
+                        </a:spcAft>
+                        <a:buClrTx/>
+                        <a:buSzTx/>
+                        <a:buFontTx/>
+                        <a:buNone/>
+                        <a:tabLst/>
+                        <a:defRPr/>
+                      </a:pPr>
+                      <a:r>
+                        <a:rPr lang="en-GB" dirty="0"/>
+                        <a:t>…</a:t>
+                      </a:r>
+                      <a:endParaRPr lang="en-DE" dirty="0"/>
+                    </a:p>
+                  </a:txBody>
+                  <a:tcPr>
+                    <a:solidFill>
+                      <a:schemeClr val="bg1">
+                        <a:lumMod val="75000"/>
+                        <a:alpha val="20000"/>
+                      </a:schemeClr>
+                    </a:solidFill>
+                  </a:tcPr>
+                </a:tc>
+                <a:extLst>
+                  <a:ext uri="{0D108BD9-81ED-4DB2-BD59-A6C34878D82A}">
+                    <a16:rowId xmlns:a16="http://schemas.microsoft.com/office/drawing/2014/main" val="840994641"/>
+                  </a:ext>
+                </a:extLst>
+              </a:tr>
+              <a:tr h="370840">
+                <a:tc>
+                  <a:txBody>
+                    <a:bodyPr/>
+                    <a:lstStyle/>
+                    <a:p>
+                      <a:r>
+                        <a:rPr lang="en-GB" dirty="0">
+                          <a:solidFill>
+                            <a:srgbClr val="7030A0"/>
+                          </a:solidFill>
+                        </a:rPr>
+                        <a:t>BA.2</a:t>
+                      </a:r>
+                      <a:endParaRPr lang="en-DE" dirty="0">
+                        <a:solidFill>
+                          <a:srgbClr val="7030A0"/>
+                        </a:solidFill>
+                      </a:endParaRPr>
+                    </a:p>
+                  </a:txBody>
+                  <a:tcPr/>
+                </a:tc>
+                <a:tc>
+                  <a:txBody>
+                    <a:bodyPr/>
+                    <a:lstStyle/>
+                    <a:p>
+                      <a:r>
+                        <a:rPr lang="en-GB" dirty="0"/>
+                        <a:t>54</a:t>
+                      </a:r>
+                      <a:endParaRPr lang="en-DE" dirty="0"/>
+                    </a:p>
+                  </a:txBody>
+                  <a:tcPr/>
+                </a:tc>
+                <a:tc>
+                  <a:txBody>
+                    <a:bodyPr/>
+                    <a:lstStyle/>
+                    <a:p>
+                      <a:pPr marL="0" marR="0" lvl="0" indent="0" algn="l" defTabSz="914400" rtl="0" eaLnBrk="1" fontAlgn="auto" latinLnBrk="0" hangingPunct="1">
+                        <a:lnSpc>
+                          <a:spcPct val="100000"/>
+                        </a:lnSpc>
+                        <a:spcBef>
+                          <a:spcPts val="0"/>
+                        </a:spcBef>
+                        <a:spcAft>
+                          <a:spcPts val="0"/>
+                        </a:spcAft>
+                        <a:buClrTx/>
+                        <a:buSzTx/>
+                        <a:buFontTx/>
+                        <a:buNone/>
+                        <a:tabLst/>
+                        <a:defRPr/>
+                      </a:pPr>
+                      <a:r>
+                        <a:rPr lang="en-GB" dirty="0">
+                          <a:solidFill>
+                            <a:srgbClr val="FF0000"/>
+                          </a:solidFill>
+                        </a:rPr>
+                        <a:t>72</a:t>
+                      </a:r>
+                      <a:endParaRPr lang="en-DE" dirty="0">
+                        <a:solidFill>
+                          <a:srgbClr val="FF0000"/>
+                        </a:solidFill>
+                      </a:endParaRPr>
+                    </a:p>
+                  </a:txBody>
+                  <a:tcPr/>
+                </a:tc>
+                <a:tc>
+                  <a:txBody>
+                    <a:bodyPr/>
+                    <a:lstStyle/>
+                    <a:p>
+                      <a:pPr marL="0" marR="0" lvl="0" indent="0" algn="l" defTabSz="914400" rtl="0" eaLnBrk="1" fontAlgn="auto" latinLnBrk="0" hangingPunct="1">
+                        <a:lnSpc>
+                          <a:spcPct val="100000"/>
+                        </a:lnSpc>
+                        <a:spcBef>
+                          <a:spcPts val="0"/>
+                        </a:spcBef>
+                        <a:spcAft>
+                          <a:spcPts val="0"/>
+                        </a:spcAft>
+                        <a:buClrTx/>
+                        <a:buSzTx/>
+                        <a:buFontTx/>
+                        <a:buNone/>
+                        <a:tabLst/>
+                        <a:defRPr/>
+                      </a:pPr>
+                      <a:r>
+                        <a:rPr lang="en-GB" dirty="0"/>
+                        <a:t>…</a:t>
+                      </a:r>
+                      <a:endParaRPr lang="en-DE" dirty="0"/>
+                    </a:p>
+                  </a:txBody>
+                  <a:tcPr/>
+                </a:tc>
+                <a:extLst>
+                  <a:ext uri="{0D108BD9-81ED-4DB2-BD59-A6C34878D82A}">
+                    <a16:rowId xmlns:a16="http://schemas.microsoft.com/office/drawing/2014/main" val="2051936593"/>
+                  </a:ext>
+                </a:extLst>
+              </a:tr>
+              <a:tr h="370840">
+                <a:tc>
+                  <a:txBody>
+                    <a:bodyPr/>
+                    <a:lstStyle/>
+                    <a:p>
+                      <a:r>
+                        <a:rPr lang="en-GB" dirty="0">
+                          <a:solidFill>
+                            <a:srgbClr val="EA4D83"/>
+                          </a:solidFill>
+                        </a:rPr>
+                        <a:t>BA.5</a:t>
+                      </a:r>
+                      <a:endParaRPr lang="en-DE" dirty="0">
+                        <a:solidFill>
+                          <a:srgbClr val="EA4D83"/>
+                        </a:solidFill>
+                      </a:endParaRPr>
+                    </a:p>
+                  </a:txBody>
+                  <a:tcPr>
+                    <a:solidFill>
+                      <a:schemeClr val="bg1">
+                        <a:lumMod val="75000"/>
+                        <a:alpha val="20000"/>
+                      </a:schemeClr>
+                    </a:solidFill>
+                  </a:tcPr>
+                </a:tc>
+                <a:tc>
+                  <a:txBody>
+                    <a:bodyPr/>
+                    <a:lstStyle/>
+                    <a:p>
+                      <a:r>
+                        <a:rPr lang="en-GB" dirty="0"/>
+                        <a:t>98</a:t>
+                      </a:r>
+                      <a:endParaRPr lang="en-DE" dirty="0"/>
+                    </a:p>
+                  </a:txBody>
+                  <a:tcPr>
+                    <a:solidFill>
+                      <a:schemeClr val="bg1">
+                        <a:lumMod val="75000"/>
+                        <a:alpha val="20000"/>
+                      </a:schemeClr>
+                    </a:solidFill>
+                  </a:tcPr>
+                </a:tc>
+                <a:tc>
+                  <a:txBody>
+                    <a:bodyPr/>
+                    <a:lstStyle/>
+                    <a:p>
+                      <a:r>
+                        <a:rPr lang="en-GB" dirty="0"/>
+                        <a:t>345</a:t>
+                      </a:r>
+                      <a:endParaRPr lang="en-DE" dirty="0"/>
+                    </a:p>
+                  </a:txBody>
+                  <a:tcPr>
+                    <a:solidFill>
+                      <a:schemeClr val="bg1">
+                        <a:lumMod val="75000"/>
+                        <a:alpha val="20000"/>
+                      </a:schemeClr>
+                    </a:solidFill>
+                  </a:tcPr>
+                </a:tc>
+                <a:tc>
+                  <a:txBody>
+                    <a:bodyPr/>
+                    <a:lstStyle/>
+                    <a:p>
+                      <a:r>
+                        <a:rPr lang="en-GB" dirty="0"/>
+                        <a:t>…</a:t>
+                      </a:r>
+                      <a:endParaRPr lang="en-DE" dirty="0"/>
+                    </a:p>
+                  </a:txBody>
+                  <a:tcPr>
+                    <a:solidFill>
+                      <a:schemeClr val="bg1">
+                        <a:lumMod val="75000"/>
+                        <a:alpha val="20000"/>
+                      </a:schemeClr>
+                    </a:solidFill>
+                  </a:tcPr>
+                </a:tc>
+                <a:extLst>
+                  <a:ext uri="{0D108BD9-81ED-4DB2-BD59-A6C34878D82A}">
+                    <a16:rowId xmlns:a16="http://schemas.microsoft.com/office/drawing/2014/main" val="1541770388"/>
+                  </a:ext>
+                </a:extLst>
+              </a:tr>
+              <a:tr h="370840">
+                <a:tc>
+                  <a:txBody>
+                    <a:bodyPr/>
+                    <a:lstStyle/>
+                    <a:p>
+                      <a:r>
+                        <a:rPr lang="en-GB" dirty="0">
+                          <a:solidFill>
+                            <a:srgbClr val="7030A0"/>
+                          </a:solidFill>
+                        </a:rPr>
+                        <a:t>…</a:t>
+                      </a:r>
+                      <a:endParaRPr lang="en-DE" dirty="0">
+                        <a:solidFill>
+                          <a:srgbClr val="7030A0"/>
+                        </a:solidFill>
+                      </a:endParaRPr>
+                    </a:p>
+                  </a:txBody>
+                  <a:tcPr/>
+                </a:tc>
+                <a:tc>
+                  <a:txBody>
+                    <a:bodyPr/>
+                    <a:lstStyle/>
+                    <a:p>
+                      <a:r>
+                        <a:rPr lang="en-GB" dirty="0"/>
+                        <a:t>…</a:t>
+                      </a:r>
+                      <a:endParaRPr lang="en-DE" dirty="0"/>
+                    </a:p>
+                  </a:txBody>
+                  <a:tcPr/>
+                </a:tc>
+                <a:tc>
+                  <a:txBody>
+                    <a:bodyPr/>
+                    <a:lstStyle/>
+                    <a:p>
+                      <a:pPr marL="0" marR="0" lvl="0" indent="0" algn="l" defTabSz="914400" rtl="0" eaLnBrk="1" fontAlgn="auto" latinLnBrk="0" hangingPunct="1">
+                        <a:lnSpc>
+                          <a:spcPct val="100000"/>
+                        </a:lnSpc>
+                        <a:spcBef>
+                          <a:spcPts val="0"/>
+                        </a:spcBef>
+                        <a:spcAft>
+                          <a:spcPts val="0"/>
+                        </a:spcAft>
+                        <a:buClrTx/>
+                        <a:buSzTx/>
+                        <a:buFontTx/>
+                        <a:buNone/>
+                        <a:tabLst/>
+                        <a:defRPr/>
+                      </a:pPr>
+                      <a:r>
+                        <a:rPr lang="en-GB" dirty="0"/>
+                        <a:t>…</a:t>
+                      </a:r>
+                      <a:endParaRPr lang="en-DE" dirty="0"/>
+                    </a:p>
+                  </a:txBody>
+                  <a:tcPr/>
+                </a:tc>
+                <a:tc>
+                  <a:txBody>
+                    <a:bodyPr/>
+                    <a:lstStyle/>
+                    <a:p>
+                      <a:pPr marL="0" marR="0" lvl="0" indent="0" algn="l" defTabSz="914400" rtl="0" eaLnBrk="1" fontAlgn="auto" latinLnBrk="0" hangingPunct="1">
+                        <a:lnSpc>
+                          <a:spcPct val="100000"/>
+                        </a:lnSpc>
+                        <a:spcBef>
+                          <a:spcPts val="0"/>
+                        </a:spcBef>
+                        <a:spcAft>
+                          <a:spcPts val="0"/>
+                        </a:spcAft>
+                        <a:buClrTx/>
+                        <a:buSzTx/>
+                        <a:buFontTx/>
+                        <a:buNone/>
+                        <a:tabLst/>
+                        <a:defRPr/>
+                      </a:pPr>
+                      <a:endParaRPr lang="en-DE" dirty="0"/>
+                    </a:p>
+                  </a:txBody>
+                  <a:tcPr/>
+                </a:tc>
+                <a:extLst>
+                  <a:ext uri="{0D108BD9-81ED-4DB2-BD59-A6C34878D82A}">
+                    <a16:rowId xmlns:a16="http://schemas.microsoft.com/office/drawing/2014/main" val="3388985870"/>
+                  </a:ext>
+                </a:extLst>
+              </a:tr>
+            </a:tbl>
+          </a:graphicData>
+        </a:graphic>
+      </p:graphicFrame>
+      <p:cxnSp>
+        <p:nvCxnSpPr>
+          <p:cNvPr id="19" name="Straight Arrow Connector 18">
+            <a:extLst>
+              <a:ext uri="{FF2B5EF4-FFF2-40B4-BE49-F238E27FC236}">
+                <a16:creationId xmlns:a16="http://schemas.microsoft.com/office/drawing/2014/main" id="{B78AA739-B2CB-8CD9-DD7E-597AE1D915EF}"/>
+              </a:ext>
+            </a:extLst>
+          </p:cNvPr>
+          <p:cNvCxnSpPr>
+            <a:cxnSpLocks/>
+          </p:cNvCxnSpPr>
+          <p:nvPr/>
+        </p:nvCxnSpPr>
+        <p:spPr>
+          <a:xfrm flipH="1">
+            <a:off x="6177280" y="4897120"/>
+            <a:ext cx="1361440" cy="0"/>
+          </a:xfrm>
+          <a:prstGeom prst="straightConnector1">
+            <a:avLst/>
+          </a:prstGeom>
+          <a:ln w="28575">
+            <a:solidFill>
+              <a:schemeClr val="tx1"/>
+            </a:solidFill>
+            <a:tailEnd type="triangle"/>
+          </a:ln>
+        </p:spPr>
+        <p:style>
+          <a:lnRef idx="2">
+            <a:schemeClr val="accent1"/>
+          </a:lnRef>
+          <a:fillRef idx="0">
+            <a:schemeClr val="accent1"/>
+          </a:fillRef>
+          <a:effectRef idx="1">
+            <a:schemeClr val="accent1"/>
+          </a:effectRef>
+          <a:fontRef idx="minor">
+            <a:schemeClr val="tx1"/>
+          </a:fontRef>
+        </p:style>
+      </p:cxnSp>
+      <p:cxnSp>
+        <p:nvCxnSpPr>
+          <p:cNvPr id="3" name="Straight Arrow Connector 2">
+            <a:extLst>
+              <a:ext uri="{FF2B5EF4-FFF2-40B4-BE49-F238E27FC236}">
+                <a16:creationId xmlns:a16="http://schemas.microsoft.com/office/drawing/2014/main" id="{B564DAC9-501D-AC3A-A054-46ADFE2EB78D}"/>
+              </a:ext>
+            </a:extLst>
+          </p:cNvPr>
+          <p:cNvCxnSpPr>
+            <a:cxnSpLocks/>
+          </p:cNvCxnSpPr>
+          <p:nvPr/>
+        </p:nvCxnSpPr>
+        <p:spPr>
+          <a:xfrm flipH="1">
+            <a:off x="8778240" y="3083859"/>
+            <a:ext cx="953845" cy="45421"/>
+          </a:xfrm>
+          <a:prstGeom prst="straightConnector1">
+            <a:avLst/>
+          </a:prstGeom>
+          <a:ln w="19050">
+            <a:solidFill>
+              <a:schemeClr val="tx1"/>
+            </a:solidFill>
+            <a:headEnd type="triangle" w="med" len="med"/>
+            <a:tailEnd type="triangle" w="med" len="med"/>
+          </a:ln>
+        </p:spPr>
+        <p:style>
+          <a:lnRef idx="2">
+            <a:schemeClr val="accent1"/>
+          </a:lnRef>
+          <a:fillRef idx="0">
+            <a:schemeClr val="accent1"/>
+          </a:fillRef>
+          <a:effectRef idx="1">
+            <a:schemeClr val="accent1"/>
+          </a:effectRef>
+          <a:fontRef idx="minor">
+            <a:schemeClr val="tx1"/>
+          </a:fontRef>
+        </p:style>
+      </p:cxnSp>
+      <p:sp>
+        <p:nvSpPr>
+          <p:cNvPr id="16" name="TextBox 15">
+            <a:extLst>
+              <a:ext uri="{FF2B5EF4-FFF2-40B4-BE49-F238E27FC236}">
+                <a16:creationId xmlns:a16="http://schemas.microsoft.com/office/drawing/2014/main" id="{ECFB3DB4-83DB-B8F6-68B3-592E3FC6C59C}"/>
+              </a:ext>
+            </a:extLst>
+          </p:cNvPr>
+          <p:cNvSpPr txBox="1"/>
+          <p:nvPr/>
+        </p:nvSpPr>
+        <p:spPr>
+          <a:xfrm>
+            <a:off x="489888" y="3983162"/>
+            <a:ext cx="1660134" cy="369332"/>
+          </a:xfrm>
+          <a:prstGeom prst="rect">
+            <a:avLst/>
+          </a:prstGeom>
+          <a:noFill/>
+        </p:spPr>
+        <p:txBody>
+          <a:bodyPr wrap="none" rtlCol="0">
+            <a:spAutoFit/>
+          </a:bodyPr>
+          <a:lstStyle/>
+          <a:p>
+            <a:r>
+              <a:rPr lang="en-US" dirty="0"/>
+              <a:t>Reconstructed</a:t>
+            </a:r>
+          </a:p>
+        </p:txBody>
+      </p:sp>
+      <p:sp>
+        <p:nvSpPr>
+          <p:cNvPr id="20" name="Arc 19">
+            <a:extLst>
+              <a:ext uri="{FF2B5EF4-FFF2-40B4-BE49-F238E27FC236}">
+                <a16:creationId xmlns:a16="http://schemas.microsoft.com/office/drawing/2014/main" id="{6FF67C21-B99C-E770-DC75-046879E17B96}"/>
+              </a:ext>
+            </a:extLst>
+          </p:cNvPr>
+          <p:cNvSpPr/>
+          <p:nvPr/>
+        </p:nvSpPr>
+        <p:spPr>
+          <a:xfrm rot="2313109">
+            <a:off x="3796750" y="2981739"/>
+            <a:ext cx="1023730" cy="1192695"/>
+          </a:xfrm>
+          <a:prstGeom prst="arc">
+            <a:avLst/>
+          </a:prstGeom>
+          <a:ln>
+            <a:solidFill>
+              <a:schemeClr val="tx1">
+                <a:lumMod val="50000"/>
+                <a:lumOff val="50000"/>
+              </a:schemeClr>
+            </a:solidFill>
+            <a:tailEnd type="triangle"/>
+          </a:ln>
+        </p:spPr>
+        <p:style>
+          <a:lnRef idx="2">
+            <a:schemeClr val="accent1"/>
+          </a:lnRef>
+          <a:fillRef idx="0">
+            <a:schemeClr val="accent1"/>
+          </a:fillRef>
+          <a:effectRef idx="1">
+            <a:schemeClr val="accent1"/>
+          </a:effectRef>
+          <a:fontRef idx="minor">
+            <a:schemeClr val="tx1"/>
+          </a:fontRef>
+        </p:style>
+        <p:txBody>
+          <a:bodyPr rtlCol="0" anchor="ctr"/>
+          <a:lstStyle/>
+          <a:p>
+            <a:pPr algn="ctr"/>
+            <a:endParaRPr lang="en-US">
+              <a:solidFill>
+                <a:schemeClr val="bg2">
+                  <a:lumMod val="50000"/>
+                </a:schemeClr>
+              </a:solidFill>
+            </a:endParaRPr>
+          </a:p>
+        </p:txBody>
+      </p:sp>
+      <p:sp>
+        <p:nvSpPr>
+          <p:cNvPr id="22" name="TextBox 21">
+            <a:extLst>
+              <a:ext uri="{FF2B5EF4-FFF2-40B4-BE49-F238E27FC236}">
+                <a16:creationId xmlns:a16="http://schemas.microsoft.com/office/drawing/2014/main" id="{3104AB98-08B4-33E2-837D-512ED0622472}"/>
+              </a:ext>
+            </a:extLst>
+          </p:cNvPr>
+          <p:cNvSpPr txBox="1"/>
+          <p:nvPr/>
+        </p:nvSpPr>
+        <p:spPr>
+          <a:xfrm>
+            <a:off x="4840356" y="3343725"/>
+            <a:ext cx="2753140" cy="276999"/>
+          </a:xfrm>
+          <a:prstGeom prst="rect">
+            <a:avLst/>
+          </a:prstGeom>
+          <a:noFill/>
+        </p:spPr>
+        <p:txBody>
+          <a:bodyPr wrap="square">
+            <a:spAutoFit/>
+          </a:bodyPr>
+          <a:lstStyle/>
+          <a:p>
+            <a:r>
+              <a:rPr lang="en-GB" sz="1200" dirty="0">
+                <a:solidFill>
+                  <a:schemeClr val="bg2">
+                    <a:lumMod val="50000"/>
+                  </a:schemeClr>
+                </a:solidFill>
+              </a:rPr>
+              <a:t>(steal max in column data values)</a:t>
+            </a:r>
+            <a:endParaRPr lang="en-US" sz="1200" dirty="0">
+              <a:solidFill>
+                <a:schemeClr val="bg2">
+                  <a:lumMod val="50000"/>
+                </a:schemeClr>
+              </a:solidFill>
+            </a:endParaRPr>
+          </a:p>
+        </p:txBody>
+      </p:sp>
+      <p:sp>
+        <p:nvSpPr>
+          <p:cNvPr id="9" name="TextBox 8">
+            <a:extLst>
+              <a:ext uri="{FF2B5EF4-FFF2-40B4-BE49-F238E27FC236}">
+                <a16:creationId xmlns:a16="http://schemas.microsoft.com/office/drawing/2014/main" id="{8FD9CFB1-371F-BEE0-F6BC-0E52A34D55D6}"/>
+              </a:ext>
+            </a:extLst>
+          </p:cNvPr>
+          <p:cNvSpPr txBox="1"/>
+          <p:nvPr/>
+        </p:nvSpPr>
+        <p:spPr>
+          <a:xfrm>
+            <a:off x="535608" y="6162482"/>
+            <a:ext cx="4096378" cy="369332"/>
+          </a:xfrm>
+          <a:prstGeom prst="rect">
+            <a:avLst/>
+          </a:prstGeom>
+          <a:noFill/>
+        </p:spPr>
+        <p:txBody>
+          <a:bodyPr wrap="none" rtlCol="0">
+            <a:spAutoFit/>
+          </a:bodyPr>
+          <a:lstStyle/>
+          <a:p>
+            <a:r>
+              <a:rPr lang="en-US" dirty="0"/>
+              <a:t>We know </a:t>
+            </a:r>
+            <a:r>
+              <a:rPr lang="en-US" dirty="0">
+                <a:solidFill>
+                  <a:srgbClr val="FF0000"/>
+                </a:solidFill>
+              </a:rPr>
+              <a:t>X = 80</a:t>
+            </a:r>
+            <a:r>
+              <a:rPr lang="en-US" dirty="0"/>
+              <a:t>, so CV error is 80-72 = </a:t>
+            </a:r>
+            <a:r>
+              <a:rPr lang="en-US" dirty="0">
+                <a:solidFill>
+                  <a:srgbClr val="FF0000"/>
+                </a:solidFill>
+              </a:rPr>
+              <a:t>8</a:t>
+            </a:r>
+          </a:p>
+        </p:txBody>
+      </p:sp>
+      <p:sp>
+        <p:nvSpPr>
+          <p:cNvPr id="11" name="TextBox 10">
+            <a:extLst>
+              <a:ext uri="{FF2B5EF4-FFF2-40B4-BE49-F238E27FC236}">
+                <a16:creationId xmlns:a16="http://schemas.microsoft.com/office/drawing/2014/main" id="{47D0F2FE-3EEB-6B46-BC15-ED7C4C99BD85}"/>
+              </a:ext>
+            </a:extLst>
+          </p:cNvPr>
+          <p:cNvSpPr txBox="1"/>
+          <p:nvPr/>
+        </p:nvSpPr>
+        <p:spPr>
+          <a:xfrm>
+            <a:off x="527436" y="6467925"/>
+            <a:ext cx="3694044" cy="276999"/>
+          </a:xfrm>
+          <a:prstGeom prst="rect">
+            <a:avLst/>
+          </a:prstGeom>
+          <a:noFill/>
+        </p:spPr>
+        <p:txBody>
+          <a:bodyPr wrap="square">
+            <a:spAutoFit/>
+          </a:bodyPr>
+          <a:lstStyle/>
+          <a:p>
+            <a:r>
+              <a:rPr lang="en-GB" sz="1200" dirty="0">
+                <a:solidFill>
+                  <a:schemeClr val="bg2">
+                    <a:lumMod val="50000"/>
+                  </a:schemeClr>
+                </a:solidFill>
+              </a:rPr>
+              <a:t>(but really we work in log space, so CV error is 0.15)</a:t>
+            </a:r>
+            <a:endParaRPr lang="en-US" sz="1200" dirty="0">
+              <a:solidFill>
+                <a:schemeClr val="bg2">
+                  <a:lumMod val="50000"/>
+                </a:schemeClr>
+              </a:solidFill>
+            </a:endParaRPr>
+          </a:p>
+        </p:txBody>
+      </p:sp>
+    </p:spTree>
+    <p:extLst>
+      <p:ext uri="{BB962C8B-B14F-4D97-AF65-F5344CB8AC3E}">
+        <p14:creationId xmlns:p14="http://schemas.microsoft.com/office/powerpoint/2010/main" val="1159949362"/>
       </p:ext>
     </p:extLst>
   </p:cSld>
